--- a/presentations/04_weekly_summary_open_vocabulary_vad_en.pptx
+++ b/presentations/04_weekly_summary_open_vocabulary_vad_en.pptx
@@ -5,23 +5,23 @@
     <p:sldMasterId id="2147483648" r:id="rId1"/>
   </p:sldMasterIdLst>
   <p:sldIdLst>
-    <p:sldId id="256" r:id="rId7"/>
-    <p:sldId id="257" r:id="rId8"/>
-    <p:sldId id="258" r:id="rId9"/>
-    <p:sldId id="259" r:id="rId10"/>
-    <p:sldId id="260" r:id="rId11"/>
-    <p:sldId id="261" r:id="rId12"/>
-    <p:sldId id="262" r:id="rId13"/>
-    <p:sldId id="263" r:id="rId14"/>
-    <p:sldId id="264" r:id="rId15"/>
-    <p:sldId id="265" r:id="rId16"/>
-    <p:sldId id="266" r:id="rId17"/>
-    <p:sldId id="267" r:id="rId18"/>
-    <p:sldId id="268" r:id="rId19"/>
-    <p:sldId id="269" r:id="rId20"/>
-    <p:sldId id="270" r:id="rId21"/>
+    <p:sldId id="256" r:id="rId2"/>
+    <p:sldId id="257" r:id="rId3"/>
+    <p:sldId id="258" r:id="rId4"/>
+    <p:sldId id="259" r:id="rId5"/>
+    <p:sldId id="260" r:id="rId6"/>
+    <p:sldId id="261" r:id="rId7"/>
+    <p:sldId id="262" r:id="rId8"/>
+    <p:sldId id="263" r:id="rId9"/>
+    <p:sldId id="264" r:id="rId10"/>
+    <p:sldId id="265" r:id="rId11"/>
+    <p:sldId id="266" r:id="rId12"/>
+    <p:sldId id="267" r:id="rId13"/>
+    <p:sldId id="268" r:id="rId14"/>
+    <p:sldId id="269" r:id="rId15"/>
+    <p:sldId id="270" r:id="rId16"/>
   </p:sldIdLst>
-  <p:sldSz cx="12191695" cy="6858000" type="screen4x3"/>
+  <p:sldSz cx="12192000" cy="6858000"/>
   <p:notesSz cx="6858000" cy="9144000"/>
   <p:defaultTextStyle>
     <a:defPPr>
@@ -118,6 +118,22 @@
       </a:defRPr>
     </a:lvl9pPr>
   </p:defaultTextStyle>
+  <p:extLst>
+    <p:ext uri="{EFAFB233-063F-42B5-8137-9DF3F51BA10A}">
+      <p15:sldGuideLst xmlns:p15="http://schemas.microsoft.com/office/powerpoint/2012/main">
+        <p15:guide id="1" orient="horz" pos="2160">
+          <p15:clr>
+            <a:srgbClr val="A4A3A4"/>
+          </p15:clr>
+        </p15:guide>
+        <p15:guide id="2" pos="2880">
+          <p15:clr>
+            <a:srgbClr val="A4A3A4"/>
+          </p15:clr>
+        </p15:guide>
+      </p15:sldGuideLst>
+    </p:ext>
+  </p:extLst>
 </p:presentation>
 </file>
 
@@ -159,10 +175,9 @@
           <a:lstStyle/>
           <a:p>
             <a:r>
-              <a:rPr lang="en-US" smtClean="0"/>
+              <a:rPr lang="en-US"/>
               <a:t>Click to edit Master title style</a:t>
             </a:r>
-            <a:endParaRPr lang="en-US"/>
           </a:p>
         </p:txBody>
       </p:sp>
@@ -278,10 +293,9 @@
           </a:lstStyle>
           <a:p>
             <a:r>
-              <a:rPr lang="en-US" smtClean="0"/>
+              <a:rPr lang="en-US"/>
               <a:t>Click to edit Master subtitle style</a:t>
             </a:r>
-            <a:endParaRPr lang="en-US"/>
           </a:p>
         </p:txBody>
       </p:sp>
@@ -302,7 +316,7 @@
           <a:p>
             <a:fld id="{5BCAD085-E8A6-8845-BD4E-CB4CCA059FC4}" type="datetimeFigureOut">
               <a:rPr lang="en-US" smtClean="0"/>
-              <a:t>1/27/13</a:t>
+              <a:t>7/13/2026</a:t>
             </a:fld>
             <a:endParaRPr lang="en-US"/>
           </a:p>
@@ -344,7 +358,7 @@
           <a:p>
             <a:fld id="{C1FF6DA9-008F-8B48-92A6-B652298478BF}" type="slidenum">
               <a:rPr lang="en-US" smtClean="0"/>
-              <a:t>‹#›</a:t>
+              <a:t>‹Nº›</a:t>
             </a:fld>
             <a:endParaRPr lang="en-US"/>
           </a:p>
@@ -396,10 +410,9 @@
           <a:lstStyle/>
           <a:p>
             <a:r>
-              <a:rPr lang="en-US" smtClean="0"/>
+              <a:rPr lang="en-US"/>
               <a:t>Click to edit Master title style</a:t>
             </a:r>
-            <a:endParaRPr lang="en-US"/>
           </a:p>
         </p:txBody>
       </p:sp>
@@ -420,38 +433,37 @@
           <a:p>
             <a:pPr lvl="0"/>
             <a:r>
-              <a:rPr lang="en-US" smtClean="0"/>
+              <a:rPr lang="en-US"/>
               <a:t>Click to edit Master text styles</a:t>
             </a:r>
           </a:p>
           <a:p>
             <a:pPr lvl="1"/>
             <a:r>
-              <a:rPr lang="en-US" smtClean="0"/>
+              <a:rPr lang="en-US"/>
               <a:t>Second level</a:t>
             </a:r>
           </a:p>
           <a:p>
             <a:pPr lvl="2"/>
             <a:r>
-              <a:rPr lang="en-US" smtClean="0"/>
+              <a:rPr lang="en-US"/>
               <a:t>Third level</a:t>
             </a:r>
           </a:p>
           <a:p>
             <a:pPr lvl="3"/>
             <a:r>
-              <a:rPr lang="en-US" smtClean="0"/>
+              <a:rPr lang="en-US"/>
               <a:t>Fourth level</a:t>
             </a:r>
           </a:p>
           <a:p>
             <a:pPr lvl="4"/>
             <a:r>
-              <a:rPr lang="en-US" smtClean="0"/>
+              <a:rPr lang="en-US"/>
               <a:t>Fifth level</a:t>
             </a:r>
-            <a:endParaRPr lang="en-US"/>
           </a:p>
         </p:txBody>
       </p:sp>
@@ -472,7 +484,7 @@
           <a:p>
             <a:fld id="{5BCAD085-E8A6-8845-BD4E-CB4CCA059FC4}" type="datetimeFigureOut">
               <a:rPr lang="en-US" smtClean="0"/>
-              <a:t>1/27/13</a:t>
+              <a:t>7/13/2026</a:t>
             </a:fld>
             <a:endParaRPr lang="en-US"/>
           </a:p>
@@ -514,7 +526,7 @@
           <a:p>
             <a:fld id="{C1FF6DA9-008F-8B48-92A6-B652298478BF}" type="slidenum">
               <a:rPr lang="en-US" smtClean="0"/>
-              <a:t>‹#›</a:t>
+              <a:t>‹Nº›</a:t>
             </a:fld>
             <a:endParaRPr lang="en-US"/>
           </a:p>
@@ -571,10 +583,9 @@
           <a:lstStyle/>
           <a:p>
             <a:r>
-              <a:rPr lang="en-US" smtClean="0"/>
+              <a:rPr lang="en-US"/>
               <a:t>Click to edit Master title style</a:t>
             </a:r>
-            <a:endParaRPr lang="en-US"/>
           </a:p>
         </p:txBody>
       </p:sp>
@@ -600,38 +611,37 @@
           <a:p>
             <a:pPr lvl="0"/>
             <a:r>
-              <a:rPr lang="en-US" smtClean="0"/>
+              <a:rPr lang="en-US"/>
               <a:t>Click to edit Master text styles</a:t>
             </a:r>
           </a:p>
           <a:p>
             <a:pPr lvl="1"/>
             <a:r>
-              <a:rPr lang="en-US" smtClean="0"/>
+              <a:rPr lang="en-US"/>
               <a:t>Second level</a:t>
             </a:r>
           </a:p>
           <a:p>
             <a:pPr lvl="2"/>
             <a:r>
-              <a:rPr lang="en-US" smtClean="0"/>
+              <a:rPr lang="en-US"/>
               <a:t>Third level</a:t>
             </a:r>
           </a:p>
           <a:p>
             <a:pPr lvl="3"/>
             <a:r>
-              <a:rPr lang="en-US" smtClean="0"/>
+              <a:rPr lang="en-US"/>
               <a:t>Fourth level</a:t>
             </a:r>
           </a:p>
           <a:p>
             <a:pPr lvl="4"/>
             <a:r>
-              <a:rPr lang="en-US" smtClean="0"/>
+              <a:rPr lang="en-US"/>
               <a:t>Fifth level</a:t>
             </a:r>
-            <a:endParaRPr lang="en-US"/>
           </a:p>
         </p:txBody>
       </p:sp>
@@ -652,7 +662,7 @@
           <a:p>
             <a:fld id="{5BCAD085-E8A6-8845-BD4E-CB4CCA059FC4}" type="datetimeFigureOut">
               <a:rPr lang="en-US" smtClean="0"/>
-              <a:t>1/27/13</a:t>
+              <a:t>7/13/2026</a:t>
             </a:fld>
             <a:endParaRPr lang="en-US"/>
           </a:p>
@@ -694,7 +704,7 @@
           <a:p>
             <a:fld id="{C1FF6DA9-008F-8B48-92A6-B652298478BF}" type="slidenum">
               <a:rPr lang="en-US" smtClean="0"/>
-              <a:t>‹#›</a:t>
+              <a:t>‹Nº›</a:t>
             </a:fld>
             <a:endParaRPr lang="en-US"/>
           </a:p>
@@ -746,10 +756,9 @@
           <a:lstStyle/>
           <a:p>
             <a:r>
-              <a:rPr lang="en-US" smtClean="0"/>
+              <a:rPr lang="en-US"/>
               <a:t>Click to edit Master title style</a:t>
             </a:r>
-            <a:endParaRPr lang="en-US"/>
           </a:p>
         </p:txBody>
       </p:sp>
@@ -770,38 +779,37 @@
           <a:p>
             <a:pPr lvl="0"/>
             <a:r>
-              <a:rPr lang="en-US" smtClean="0"/>
+              <a:rPr lang="en-US"/>
               <a:t>Click to edit Master text styles</a:t>
             </a:r>
           </a:p>
           <a:p>
             <a:pPr lvl="1"/>
             <a:r>
-              <a:rPr lang="en-US" smtClean="0"/>
+              <a:rPr lang="en-US"/>
               <a:t>Second level</a:t>
             </a:r>
           </a:p>
           <a:p>
             <a:pPr lvl="2"/>
             <a:r>
-              <a:rPr lang="en-US" smtClean="0"/>
+              <a:rPr lang="en-US"/>
               <a:t>Third level</a:t>
             </a:r>
           </a:p>
           <a:p>
             <a:pPr lvl="3"/>
             <a:r>
-              <a:rPr lang="en-US" smtClean="0"/>
+              <a:rPr lang="en-US"/>
               <a:t>Fourth level</a:t>
             </a:r>
           </a:p>
           <a:p>
             <a:pPr lvl="4"/>
             <a:r>
-              <a:rPr lang="en-US" smtClean="0"/>
+              <a:rPr lang="en-US"/>
               <a:t>Fifth level</a:t>
             </a:r>
-            <a:endParaRPr lang="en-US"/>
           </a:p>
         </p:txBody>
       </p:sp>
@@ -822,7 +830,7 @@
           <a:p>
             <a:fld id="{5BCAD085-E8A6-8845-BD4E-CB4CCA059FC4}" type="datetimeFigureOut">
               <a:rPr lang="en-US" smtClean="0"/>
-              <a:t>1/27/13</a:t>
+              <a:t>7/13/2026</a:t>
             </a:fld>
             <a:endParaRPr lang="en-US"/>
           </a:p>
@@ -864,7 +872,7 @@
           <a:p>
             <a:fld id="{C1FF6DA9-008F-8B48-92A6-B652298478BF}" type="slidenum">
               <a:rPr lang="en-US" smtClean="0"/>
-              <a:t>‹#›</a:t>
+              <a:t>‹Nº›</a:t>
             </a:fld>
             <a:endParaRPr lang="en-US"/>
           </a:p>
@@ -925,10 +933,9 @@
           </a:lstStyle>
           <a:p>
             <a:r>
-              <a:rPr lang="en-US" smtClean="0"/>
+              <a:rPr lang="en-US"/>
               <a:t>Click to edit Master title style</a:t>
             </a:r>
-            <a:endParaRPr lang="en-US"/>
           </a:p>
         </p:txBody>
       </p:sp>
@@ -1045,7 +1052,7 @@
           <a:p>
             <a:pPr lvl="0"/>
             <a:r>
-              <a:rPr lang="en-US" smtClean="0"/>
+              <a:rPr lang="en-US"/>
               <a:t>Click to edit Master text styles</a:t>
             </a:r>
           </a:p>
@@ -1068,7 +1075,7 @@
           <a:p>
             <a:fld id="{5BCAD085-E8A6-8845-BD4E-CB4CCA059FC4}" type="datetimeFigureOut">
               <a:rPr lang="en-US" smtClean="0"/>
-              <a:t>1/27/13</a:t>
+              <a:t>7/13/2026</a:t>
             </a:fld>
             <a:endParaRPr lang="en-US"/>
           </a:p>
@@ -1110,7 +1117,7 @@
           <a:p>
             <a:fld id="{C1FF6DA9-008F-8B48-92A6-B652298478BF}" type="slidenum">
               <a:rPr lang="en-US" smtClean="0"/>
-              <a:t>‹#›</a:t>
+              <a:t>‹Nº›</a:t>
             </a:fld>
             <a:endParaRPr lang="en-US"/>
           </a:p>
@@ -1162,10 +1169,9 @@
           <a:lstStyle/>
           <a:p>
             <a:r>
-              <a:rPr lang="en-US" smtClean="0"/>
+              <a:rPr lang="en-US"/>
               <a:t>Click to edit Master title style</a:t>
             </a:r>
-            <a:endParaRPr lang="en-US"/>
           </a:p>
         </p:txBody>
       </p:sp>
@@ -1219,38 +1225,37 @@
           <a:p>
             <a:pPr lvl="0"/>
             <a:r>
-              <a:rPr lang="en-US" smtClean="0"/>
+              <a:rPr lang="en-US"/>
               <a:t>Click to edit Master text styles</a:t>
             </a:r>
           </a:p>
           <a:p>
             <a:pPr lvl="1"/>
             <a:r>
-              <a:rPr lang="en-US" smtClean="0"/>
+              <a:rPr lang="en-US"/>
               <a:t>Second level</a:t>
             </a:r>
           </a:p>
           <a:p>
             <a:pPr lvl="2"/>
             <a:r>
-              <a:rPr lang="en-US" smtClean="0"/>
+              <a:rPr lang="en-US"/>
               <a:t>Third level</a:t>
             </a:r>
           </a:p>
           <a:p>
             <a:pPr lvl="3"/>
             <a:r>
-              <a:rPr lang="en-US" smtClean="0"/>
+              <a:rPr lang="en-US"/>
               <a:t>Fourth level</a:t>
             </a:r>
           </a:p>
           <a:p>
             <a:pPr lvl="4"/>
             <a:r>
-              <a:rPr lang="en-US" smtClean="0"/>
+              <a:rPr lang="en-US"/>
               <a:t>Fifth level</a:t>
             </a:r>
-            <a:endParaRPr lang="en-US"/>
           </a:p>
         </p:txBody>
       </p:sp>
@@ -1304,38 +1309,37 @@
           <a:p>
             <a:pPr lvl="0"/>
             <a:r>
-              <a:rPr lang="en-US" smtClean="0"/>
+              <a:rPr lang="en-US"/>
               <a:t>Click to edit Master text styles</a:t>
             </a:r>
           </a:p>
           <a:p>
             <a:pPr lvl="1"/>
             <a:r>
-              <a:rPr lang="en-US" smtClean="0"/>
+              <a:rPr lang="en-US"/>
               <a:t>Second level</a:t>
             </a:r>
           </a:p>
           <a:p>
             <a:pPr lvl="2"/>
             <a:r>
-              <a:rPr lang="en-US" smtClean="0"/>
+              <a:rPr lang="en-US"/>
               <a:t>Third level</a:t>
             </a:r>
           </a:p>
           <a:p>
             <a:pPr lvl="3"/>
             <a:r>
-              <a:rPr lang="en-US" smtClean="0"/>
+              <a:rPr lang="en-US"/>
               <a:t>Fourth level</a:t>
             </a:r>
           </a:p>
           <a:p>
             <a:pPr lvl="4"/>
             <a:r>
-              <a:rPr lang="en-US" smtClean="0"/>
+              <a:rPr lang="en-US"/>
               <a:t>Fifth level</a:t>
             </a:r>
-            <a:endParaRPr lang="en-US"/>
           </a:p>
         </p:txBody>
       </p:sp>
@@ -1356,7 +1360,7 @@
           <a:p>
             <a:fld id="{5BCAD085-E8A6-8845-BD4E-CB4CCA059FC4}" type="datetimeFigureOut">
               <a:rPr lang="en-US" smtClean="0"/>
-              <a:t>1/27/13</a:t>
+              <a:t>7/13/2026</a:t>
             </a:fld>
             <a:endParaRPr lang="en-US"/>
           </a:p>
@@ -1398,7 +1402,7 @@
           <a:p>
             <a:fld id="{C1FF6DA9-008F-8B48-92A6-B652298478BF}" type="slidenum">
               <a:rPr lang="en-US" smtClean="0"/>
-              <a:t>‹#›</a:t>
+              <a:t>‹Nº›</a:t>
             </a:fld>
             <a:endParaRPr lang="en-US"/>
           </a:p>
@@ -1454,10 +1458,9 @@
           </a:lstStyle>
           <a:p>
             <a:r>
-              <a:rPr lang="en-US" smtClean="0"/>
+              <a:rPr lang="en-US"/>
               <a:t>Click to edit Master title style</a:t>
             </a:r>
-            <a:endParaRPr lang="en-US"/>
           </a:p>
         </p:txBody>
       </p:sp>
@@ -1520,7 +1523,7 @@
           <a:p>
             <a:pPr lvl="0"/>
             <a:r>
-              <a:rPr lang="en-US" smtClean="0"/>
+              <a:rPr lang="en-US"/>
               <a:t>Click to edit Master text styles</a:t>
             </a:r>
           </a:p>
@@ -1576,38 +1579,37 @@
           <a:p>
             <a:pPr lvl="0"/>
             <a:r>
-              <a:rPr lang="en-US" smtClean="0"/>
+              <a:rPr lang="en-US"/>
               <a:t>Click to edit Master text styles</a:t>
             </a:r>
           </a:p>
           <a:p>
             <a:pPr lvl="1"/>
             <a:r>
-              <a:rPr lang="en-US" smtClean="0"/>
+              <a:rPr lang="en-US"/>
               <a:t>Second level</a:t>
             </a:r>
           </a:p>
           <a:p>
             <a:pPr lvl="2"/>
             <a:r>
-              <a:rPr lang="en-US" smtClean="0"/>
+              <a:rPr lang="en-US"/>
               <a:t>Third level</a:t>
             </a:r>
           </a:p>
           <a:p>
             <a:pPr lvl="3"/>
             <a:r>
-              <a:rPr lang="en-US" smtClean="0"/>
+              <a:rPr lang="en-US"/>
               <a:t>Fourth level</a:t>
             </a:r>
           </a:p>
           <a:p>
             <a:pPr lvl="4"/>
             <a:r>
-              <a:rPr lang="en-US" smtClean="0"/>
+              <a:rPr lang="en-US"/>
               <a:t>Fifth level</a:t>
             </a:r>
-            <a:endParaRPr lang="en-US"/>
           </a:p>
         </p:txBody>
       </p:sp>
@@ -1670,7 +1672,7 @@
           <a:p>
             <a:pPr lvl="0"/>
             <a:r>
-              <a:rPr lang="en-US" smtClean="0"/>
+              <a:rPr lang="en-US"/>
               <a:t>Click to edit Master text styles</a:t>
             </a:r>
           </a:p>
@@ -1726,38 +1728,37 @@
           <a:p>
             <a:pPr lvl="0"/>
             <a:r>
-              <a:rPr lang="en-US" smtClean="0"/>
+              <a:rPr lang="en-US"/>
               <a:t>Click to edit Master text styles</a:t>
             </a:r>
           </a:p>
           <a:p>
             <a:pPr lvl="1"/>
             <a:r>
-              <a:rPr lang="en-US" smtClean="0"/>
+              <a:rPr lang="en-US"/>
               <a:t>Second level</a:t>
             </a:r>
           </a:p>
           <a:p>
             <a:pPr lvl="2"/>
             <a:r>
-              <a:rPr lang="en-US" smtClean="0"/>
+              <a:rPr lang="en-US"/>
               <a:t>Third level</a:t>
             </a:r>
           </a:p>
           <a:p>
             <a:pPr lvl="3"/>
             <a:r>
-              <a:rPr lang="en-US" smtClean="0"/>
+              <a:rPr lang="en-US"/>
               <a:t>Fourth level</a:t>
             </a:r>
           </a:p>
           <a:p>
             <a:pPr lvl="4"/>
             <a:r>
-              <a:rPr lang="en-US" smtClean="0"/>
+              <a:rPr lang="en-US"/>
               <a:t>Fifth level</a:t>
             </a:r>
-            <a:endParaRPr lang="en-US"/>
           </a:p>
         </p:txBody>
       </p:sp>
@@ -1778,7 +1779,7 @@
           <a:p>
             <a:fld id="{5BCAD085-E8A6-8845-BD4E-CB4CCA059FC4}" type="datetimeFigureOut">
               <a:rPr lang="en-US" smtClean="0"/>
-              <a:t>1/27/13</a:t>
+              <a:t>7/13/2026</a:t>
             </a:fld>
             <a:endParaRPr lang="en-US"/>
           </a:p>
@@ -1820,7 +1821,7 @@
           <a:p>
             <a:fld id="{C1FF6DA9-008F-8B48-92A6-B652298478BF}" type="slidenum">
               <a:rPr lang="en-US" smtClean="0"/>
-              <a:t>‹#›</a:t>
+              <a:t>‹Nº›</a:t>
             </a:fld>
             <a:endParaRPr lang="en-US"/>
           </a:p>
@@ -1872,10 +1873,9 @@
           <a:lstStyle/>
           <a:p>
             <a:r>
-              <a:rPr lang="en-US" smtClean="0"/>
+              <a:rPr lang="en-US"/>
               <a:t>Click to edit Master title style</a:t>
             </a:r>
-            <a:endParaRPr lang="en-US"/>
           </a:p>
         </p:txBody>
       </p:sp>
@@ -1896,7 +1896,7 @@
           <a:p>
             <a:fld id="{5BCAD085-E8A6-8845-BD4E-CB4CCA059FC4}" type="datetimeFigureOut">
               <a:rPr lang="en-US" smtClean="0"/>
-              <a:t>1/27/13</a:t>
+              <a:t>7/13/2026</a:t>
             </a:fld>
             <a:endParaRPr lang="en-US"/>
           </a:p>
@@ -1938,7 +1938,7 @@
           <a:p>
             <a:fld id="{C1FF6DA9-008F-8B48-92A6-B652298478BF}" type="slidenum">
               <a:rPr lang="en-US" smtClean="0"/>
-              <a:t>‹#›</a:t>
+              <a:t>‹Nº›</a:t>
             </a:fld>
             <a:endParaRPr lang="en-US"/>
           </a:p>
@@ -1991,7 +1991,7 @@
           <a:p>
             <a:fld id="{5BCAD085-E8A6-8845-BD4E-CB4CCA059FC4}" type="datetimeFigureOut">
               <a:rPr lang="en-US" smtClean="0"/>
-              <a:t>1/27/13</a:t>
+              <a:t>7/13/2026</a:t>
             </a:fld>
             <a:endParaRPr lang="en-US"/>
           </a:p>
@@ -2033,7 +2033,7 @@
           <a:p>
             <a:fld id="{C1FF6DA9-008F-8B48-92A6-B652298478BF}" type="slidenum">
               <a:rPr lang="en-US" smtClean="0"/>
-              <a:t>‹#›</a:t>
+              <a:t>‹Nº›</a:t>
             </a:fld>
             <a:endParaRPr lang="en-US"/>
           </a:p>
@@ -2094,10 +2094,9 @@
           </a:lstStyle>
           <a:p>
             <a:r>
-              <a:rPr lang="en-US" smtClean="0"/>
+              <a:rPr lang="en-US"/>
               <a:t>Click to edit Master title style</a:t>
             </a:r>
-            <a:endParaRPr lang="en-US"/>
           </a:p>
         </p:txBody>
       </p:sp>
@@ -2151,38 +2150,37 @@
           <a:p>
             <a:pPr lvl="0"/>
             <a:r>
-              <a:rPr lang="en-US" smtClean="0"/>
+              <a:rPr lang="en-US"/>
               <a:t>Click to edit Master text styles</a:t>
             </a:r>
           </a:p>
           <a:p>
             <a:pPr lvl="1"/>
             <a:r>
-              <a:rPr lang="en-US" smtClean="0"/>
+              <a:rPr lang="en-US"/>
               <a:t>Second level</a:t>
             </a:r>
           </a:p>
           <a:p>
             <a:pPr lvl="2"/>
             <a:r>
-              <a:rPr lang="en-US" smtClean="0"/>
+              <a:rPr lang="en-US"/>
               <a:t>Third level</a:t>
             </a:r>
           </a:p>
           <a:p>
             <a:pPr lvl="3"/>
             <a:r>
-              <a:rPr lang="en-US" smtClean="0"/>
+              <a:rPr lang="en-US"/>
               <a:t>Fourth level</a:t>
             </a:r>
           </a:p>
           <a:p>
             <a:pPr lvl="4"/>
             <a:r>
-              <a:rPr lang="en-US" smtClean="0"/>
+              <a:rPr lang="en-US"/>
               <a:t>Fifth level</a:t>
             </a:r>
-            <a:endParaRPr lang="en-US"/>
           </a:p>
         </p:txBody>
       </p:sp>
@@ -2245,7 +2243,7 @@
           <a:p>
             <a:pPr lvl="0"/>
             <a:r>
-              <a:rPr lang="en-US" smtClean="0"/>
+              <a:rPr lang="en-US"/>
               <a:t>Click to edit Master text styles</a:t>
             </a:r>
           </a:p>
@@ -2268,7 +2266,7 @@
           <a:p>
             <a:fld id="{5BCAD085-E8A6-8845-BD4E-CB4CCA059FC4}" type="datetimeFigureOut">
               <a:rPr lang="en-US" smtClean="0"/>
-              <a:t>1/27/13</a:t>
+              <a:t>7/13/2026</a:t>
             </a:fld>
             <a:endParaRPr lang="en-US"/>
           </a:p>
@@ -2310,7 +2308,7 @@
           <a:p>
             <a:fld id="{C1FF6DA9-008F-8B48-92A6-B652298478BF}" type="slidenum">
               <a:rPr lang="en-US" smtClean="0"/>
-              <a:t>‹#›</a:t>
+              <a:t>‹Nº›</a:t>
             </a:fld>
             <a:endParaRPr lang="en-US"/>
           </a:p>
@@ -2371,10 +2369,9 @@
           </a:lstStyle>
           <a:p>
             <a:r>
-              <a:rPr lang="en-US" smtClean="0"/>
+              <a:rPr lang="en-US"/>
               <a:t>Click to edit Master title style</a:t>
             </a:r>
-            <a:endParaRPr lang="en-US"/>
           </a:p>
         </p:txBody>
       </p:sp>
@@ -2498,7 +2495,7 @@
           <a:p>
             <a:pPr lvl="0"/>
             <a:r>
-              <a:rPr lang="en-US" smtClean="0"/>
+              <a:rPr lang="en-US"/>
               <a:t>Click to edit Master text styles</a:t>
             </a:r>
           </a:p>
@@ -2521,7 +2518,7 @@
           <a:p>
             <a:fld id="{5BCAD085-E8A6-8845-BD4E-CB4CCA059FC4}" type="datetimeFigureOut">
               <a:rPr lang="en-US" smtClean="0"/>
-              <a:t>1/27/13</a:t>
+              <a:t>7/13/2026</a:t>
             </a:fld>
             <a:endParaRPr lang="en-US"/>
           </a:p>
@@ -2563,7 +2560,7 @@
           <a:p>
             <a:fld id="{C1FF6DA9-008F-8B48-92A6-B652298478BF}" type="slidenum">
               <a:rPr lang="en-US" smtClean="0"/>
-              <a:t>‹#›</a:t>
+              <a:t>‹Nº›</a:t>
             </a:fld>
             <a:endParaRPr lang="en-US"/>
           </a:p>
@@ -2630,10 +2627,9 @@
           <a:lstStyle/>
           <a:p>
             <a:r>
-              <a:rPr lang="en-US" smtClean="0"/>
+              <a:rPr lang="en-US"/>
               <a:t>Click to edit Master title style</a:t>
             </a:r>
-            <a:endParaRPr lang="en-US"/>
           </a:p>
         </p:txBody>
       </p:sp>
@@ -2664,38 +2660,37 @@
           <a:p>
             <a:pPr lvl="0"/>
             <a:r>
-              <a:rPr lang="en-US" smtClean="0"/>
+              <a:rPr lang="en-US"/>
               <a:t>Click to edit Master text styles</a:t>
             </a:r>
           </a:p>
           <a:p>
             <a:pPr lvl="1"/>
             <a:r>
-              <a:rPr lang="en-US" smtClean="0"/>
+              <a:rPr lang="en-US"/>
               <a:t>Second level</a:t>
             </a:r>
           </a:p>
           <a:p>
             <a:pPr lvl="2"/>
             <a:r>
-              <a:rPr lang="en-US" smtClean="0"/>
+              <a:rPr lang="en-US"/>
               <a:t>Third level</a:t>
             </a:r>
           </a:p>
           <a:p>
             <a:pPr lvl="3"/>
             <a:r>
-              <a:rPr lang="en-US" smtClean="0"/>
+              <a:rPr lang="en-US"/>
               <a:t>Fourth level</a:t>
             </a:r>
           </a:p>
           <a:p>
             <a:pPr lvl="4"/>
             <a:r>
-              <a:rPr lang="en-US" smtClean="0"/>
+              <a:rPr lang="en-US"/>
               <a:t>Fifth level</a:t>
             </a:r>
-            <a:endParaRPr lang="en-US"/>
           </a:p>
         </p:txBody>
       </p:sp>
@@ -2734,7 +2729,7 @@
           <a:p>
             <a:fld id="{5BCAD085-E8A6-8845-BD4E-CB4CCA059FC4}" type="datetimeFigureOut">
               <a:rPr lang="en-US" smtClean="0"/>
-              <a:t>1/27/13</a:t>
+              <a:t>7/13/2026</a:t>
             </a:fld>
             <a:endParaRPr lang="en-US"/>
           </a:p>
@@ -2812,7 +2807,7 @@
           <a:p>
             <a:fld id="{C1FF6DA9-008F-8B48-92A6-B652298478BF}" type="slidenum">
               <a:rPr lang="en-US" smtClean="0"/>
-              <a:t>‹#›</a:t>
+              <a:t>‹Nº›</a:t>
             </a:fld>
             <a:endParaRPr lang="en-US"/>
           </a:p>
@@ -3093,7 +3088,7 @@
 </file>
 
 <file path=ppt/slides/slide1.xml><?xml version="1.0" encoding="utf-8"?>
-<p:sld xmlns:a="http://schemas.openxmlformats.org/drawingml/2006/main" xmlns:p="http://schemas.openxmlformats.org/presentationml/2006/main" xmlns:r="http://schemas.openxmlformats.org/officeDocument/2006/relationships">
+<p:sld xmlns:a="http://schemas.openxmlformats.org/drawingml/2006/main" xmlns:r="http://schemas.openxmlformats.org/officeDocument/2006/relationships" xmlns:p="http://schemas.openxmlformats.org/presentationml/2006/main">
   <p:cSld>
     <p:bg>
       <p:bgPr>
@@ -3109,7 +3104,14 @@
         <p:cNvGrpSpPr/>
         <p:nvPr/>
       </p:nvGrpSpPr>
-      <p:grpSpPr/>
+      <p:grpSpPr>
+        <a:xfrm>
+          <a:off x="0" y="0"/>
+          <a:ext cx="0" cy="0"/>
+          <a:chOff x="0" y="0"/>
+          <a:chExt cx="0" cy="0"/>
+        </a:xfrm>
+      </p:grpSpPr>
       <p:sp>
         <p:nvSpPr>
           <p:cNvPr id="2" name="Rectangle 1"/>
@@ -3152,6 +3154,7 @@
           <a:lstStyle/>
           <a:p>
             <a:pPr algn="ctr"/>
+            <a:endParaRPr/>
           </a:p>
         </p:txBody>
       </p:sp>
@@ -3269,6 +3272,7 @@
           <a:lstStyle/>
           <a:p>
             <a:pPr algn="ctr"/>
+            <a:endParaRPr/>
           </a:p>
         </p:txBody>
       </p:sp>
@@ -3352,7 +3356,7 @@
 </file>
 
 <file path=ppt/slides/slide10.xml><?xml version="1.0" encoding="utf-8"?>
-<p:sld xmlns:a="http://schemas.openxmlformats.org/drawingml/2006/main" xmlns:p="http://schemas.openxmlformats.org/presentationml/2006/main" xmlns:r="http://schemas.openxmlformats.org/officeDocument/2006/relationships">
+<p:sld xmlns:a="http://schemas.openxmlformats.org/drawingml/2006/main" xmlns:r="http://schemas.openxmlformats.org/officeDocument/2006/relationships" xmlns:p="http://schemas.openxmlformats.org/presentationml/2006/main">
   <p:cSld>
     <p:bg>
       <p:bgPr>
@@ -3368,7 +3372,14 @@
         <p:cNvGrpSpPr/>
         <p:nvPr/>
       </p:nvGrpSpPr>
-      <p:grpSpPr/>
+      <p:grpSpPr>
+        <a:xfrm>
+          <a:off x="0" y="0"/>
+          <a:ext cx="0" cy="0"/>
+          <a:chOff x="0" y="0"/>
+          <a:chExt cx="0" cy="0"/>
+        </a:xfrm>
+      </p:grpSpPr>
       <p:sp>
         <p:nvSpPr>
           <p:cNvPr id="2" name="TextBox 1"/>
@@ -3509,7 +3520,7 @@
 </file>
 
 <file path=ppt/slides/slide11.xml><?xml version="1.0" encoding="utf-8"?>
-<p:sld xmlns:a="http://schemas.openxmlformats.org/drawingml/2006/main" xmlns:p="http://schemas.openxmlformats.org/presentationml/2006/main" xmlns:r="http://schemas.openxmlformats.org/officeDocument/2006/relationships">
+<p:sld xmlns:a="http://schemas.openxmlformats.org/drawingml/2006/main" xmlns:r="http://schemas.openxmlformats.org/officeDocument/2006/relationships" xmlns:p="http://schemas.openxmlformats.org/presentationml/2006/main">
   <p:cSld>
     <p:bg>
       <p:bgPr>
@@ -3525,7 +3536,14 @@
         <p:cNvGrpSpPr/>
         <p:nvPr/>
       </p:nvGrpSpPr>
-      <p:grpSpPr/>
+      <p:grpSpPr>
+        <a:xfrm>
+          <a:off x="0" y="0"/>
+          <a:ext cx="0" cy="0"/>
+          <a:chOff x="0" y="0"/>
+          <a:chExt cx="0" cy="0"/>
+        </a:xfrm>
+      </p:grpSpPr>
       <p:sp>
         <p:nvSpPr>
           <p:cNvPr id="2" name="TextBox 1"/>
@@ -3642,7 +3660,7 @@
 </file>
 
 <file path=ppt/slides/slide12.xml><?xml version="1.0" encoding="utf-8"?>
-<p:sld xmlns:a="http://schemas.openxmlformats.org/drawingml/2006/main" xmlns:p="http://schemas.openxmlformats.org/presentationml/2006/main" xmlns:r="http://schemas.openxmlformats.org/officeDocument/2006/relationships">
+<p:sld xmlns:a="http://schemas.openxmlformats.org/drawingml/2006/main" xmlns:r="http://schemas.openxmlformats.org/officeDocument/2006/relationships" xmlns:p="http://schemas.openxmlformats.org/presentationml/2006/main">
   <p:cSld>
     <p:bg>
       <p:bgPr>
@@ -3658,7 +3676,14 @@
         <p:cNvGrpSpPr/>
         <p:nvPr/>
       </p:nvGrpSpPr>
-      <p:grpSpPr/>
+      <p:grpSpPr>
+        <a:xfrm>
+          <a:off x="0" y="0"/>
+          <a:ext cx="0" cy="0"/>
+          <a:chOff x="0" y="0"/>
+          <a:chExt cx="0" cy="0"/>
+        </a:xfrm>
+      </p:grpSpPr>
       <p:sp>
         <p:nvSpPr>
           <p:cNvPr id="2" name="TextBox 1"/>
@@ -3783,7 +3808,7 @@
 </file>
 
 <file path=ppt/slides/slide13.xml><?xml version="1.0" encoding="utf-8"?>
-<p:sld xmlns:a="http://schemas.openxmlformats.org/drawingml/2006/main" xmlns:p="http://schemas.openxmlformats.org/presentationml/2006/main" xmlns:r="http://schemas.openxmlformats.org/officeDocument/2006/relationships">
+<p:sld xmlns:a="http://schemas.openxmlformats.org/drawingml/2006/main" xmlns:r="http://schemas.openxmlformats.org/officeDocument/2006/relationships" xmlns:p="http://schemas.openxmlformats.org/presentationml/2006/main">
   <p:cSld>
     <p:bg>
       <p:bgPr>
@@ -3799,7 +3824,14 @@
         <p:cNvGrpSpPr/>
         <p:nvPr/>
       </p:nvGrpSpPr>
-      <p:grpSpPr/>
+      <p:grpSpPr>
+        <a:xfrm>
+          <a:off x="0" y="0"/>
+          <a:ext cx="0" cy="0"/>
+          <a:chOff x="0" y="0"/>
+          <a:chExt cx="0" cy="0"/>
+        </a:xfrm>
+      </p:grpSpPr>
       <p:sp>
         <p:nvSpPr>
           <p:cNvPr id="2" name="TextBox 1"/>
@@ -3880,6 +3912,7 @@
           <a:lstStyle/>
           <a:p>
             <a:pPr algn="ctr"/>
+            <a:endParaRPr/>
           </a:p>
         </p:txBody>
       </p:sp>
@@ -3927,6 +3960,7 @@
           <a:lstStyle/>
           <a:p>
             <a:pPr algn="ctr"/>
+            <a:endParaRPr/>
           </a:p>
         </p:txBody>
       </p:sp>
@@ -3974,6 +4008,7 @@
           <a:lstStyle/>
           <a:p>
             <a:pPr algn="ctr"/>
+            <a:endParaRPr/>
           </a:p>
         </p:txBody>
       </p:sp>
@@ -4021,6 +4056,7 @@
           <a:lstStyle/>
           <a:p>
             <a:pPr algn="ctr"/>
+            <a:endParaRPr/>
           </a:p>
         </p:txBody>
       </p:sp>
@@ -4068,6 +4104,7 @@
           <a:lstStyle/>
           <a:p>
             <a:pPr algn="ctr"/>
+            <a:endParaRPr/>
           </a:p>
         </p:txBody>
       </p:sp>
@@ -4347,7 +4384,7 @@
 </file>
 
 <file path=ppt/slides/slide14.xml><?xml version="1.0" encoding="utf-8"?>
-<p:sld xmlns:a="http://schemas.openxmlformats.org/drawingml/2006/main" xmlns:p="http://schemas.openxmlformats.org/presentationml/2006/main" xmlns:r="http://schemas.openxmlformats.org/officeDocument/2006/relationships">
+<p:sld xmlns:a="http://schemas.openxmlformats.org/drawingml/2006/main" xmlns:r="http://schemas.openxmlformats.org/officeDocument/2006/relationships" xmlns:p="http://schemas.openxmlformats.org/presentationml/2006/main">
   <p:cSld>
     <p:bg>
       <p:bgPr>
@@ -4363,7 +4400,14 @@
         <p:cNvGrpSpPr/>
         <p:nvPr/>
       </p:nvGrpSpPr>
-      <p:grpSpPr/>
+      <p:grpSpPr>
+        <a:xfrm>
+          <a:off x="0" y="0"/>
+          <a:ext cx="0" cy="0"/>
+          <a:chOff x="0" y="0"/>
+          <a:chExt cx="0" cy="0"/>
+        </a:xfrm>
+      </p:grpSpPr>
       <p:sp>
         <p:nvSpPr>
           <p:cNvPr id="2" name="TextBox 1"/>
@@ -4496,7 +4540,7 @@
 </file>
 
 <file path=ppt/slides/slide15.xml><?xml version="1.0" encoding="utf-8"?>
-<p:sld xmlns:a="http://schemas.openxmlformats.org/drawingml/2006/main" xmlns:p="http://schemas.openxmlformats.org/presentationml/2006/main" xmlns:r="http://schemas.openxmlformats.org/officeDocument/2006/relationships">
+<p:sld xmlns:a="http://schemas.openxmlformats.org/drawingml/2006/main" xmlns:r="http://schemas.openxmlformats.org/officeDocument/2006/relationships" xmlns:p="http://schemas.openxmlformats.org/presentationml/2006/main">
   <p:cSld>
     <p:bg>
       <p:bgPr>
@@ -4512,7 +4556,14 @@
         <p:cNvGrpSpPr/>
         <p:nvPr/>
       </p:nvGrpSpPr>
-      <p:grpSpPr/>
+      <p:grpSpPr>
+        <a:xfrm>
+          <a:off x="0" y="0"/>
+          <a:ext cx="0" cy="0"/>
+          <a:chOff x="0" y="0"/>
+          <a:chExt cx="0" cy="0"/>
+        </a:xfrm>
+      </p:grpSpPr>
       <p:sp>
         <p:nvSpPr>
           <p:cNvPr id="2" name="TextBox 1"/>
@@ -4645,7 +4696,7 @@
 </file>
 
 <file path=ppt/slides/slide2.xml><?xml version="1.0" encoding="utf-8"?>
-<p:sld xmlns:a="http://schemas.openxmlformats.org/drawingml/2006/main" xmlns:p="http://schemas.openxmlformats.org/presentationml/2006/main" xmlns:r="http://schemas.openxmlformats.org/officeDocument/2006/relationships">
+<p:sld xmlns:a="http://schemas.openxmlformats.org/drawingml/2006/main" xmlns:r="http://schemas.openxmlformats.org/officeDocument/2006/relationships" xmlns:p="http://schemas.openxmlformats.org/presentationml/2006/main">
   <p:cSld>
     <p:bg>
       <p:bgPr>
@@ -4661,7 +4712,14 @@
         <p:cNvGrpSpPr/>
         <p:nvPr/>
       </p:nvGrpSpPr>
-      <p:grpSpPr/>
+      <p:grpSpPr>
+        <a:xfrm>
+          <a:off x="0" y="0"/>
+          <a:ext cx="0" cy="0"/>
+          <a:chOff x="0" y="0"/>
+          <a:chExt cx="0" cy="0"/>
+        </a:xfrm>
+      </p:grpSpPr>
       <p:sp>
         <p:nvSpPr>
           <p:cNvPr id="2" name="TextBox 1"/>
@@ -4794,7 +4852,7 @@
 </file>
 
 <file path=ppt/slides/slide3.xml><?xml version="1.0" encoding="utf-8"?>
-<p:sld xmlns:a="http://schemas.openxmlformats.org/drawingml/2006/main" xmlns:p="http://schemas.openxmlformats.org/presentationml/2006/main" xmlns:r="http://schemas.openxmlformats.org/officeDocument/2006/relationships">
+<p:sld xmlns:a="http://schemas.openxmlformats.org/drawingml/2006/main" xmlns:r="http://schemas.openxmlformats.org/officeDocument/2006/relationships" xmlns:p="http://schemas.openxmlformats.org/presentationml/2006/main">
   <p:cSld>
     <p:bg>
       <p:bgPr>
@@ -4810,7 +4868,14 @@
         <p:cNvGrpSpPr/>
         <p:nvPr/>
       </p:nvGrpSpPr>
-      <p:grpSpPr/>
+      <p:grpSpPr>
+        <a:xfrm>
+          <a:off x="0" y="0"/>
+          <a:ext cx="0" cy="0"/>
+          <a:chOff x="0" y="0"/>
+          <a:chExt cx="0" cy="0"/>
+        </a:xfrm>
+      </p:grpSpPr>
       <p:sp>
         <p:nvSpPr>
           <p:cNvPr id="2" name="TextBox 1"/>
@@ -4978,6 +5043,7 @@
           <a:lstStyle/>
           <a:p>
             <a:pPr algn="ctr"/>
+            <a:endParaRPr/>
           </a:p>
         </p:txBody>
       </p:sp>
@@ -5062,7 +5128,7 @@
 </file>
 
 <file path=ppt/slides/slide4.xml><?xml version="1.0" encoding="utf-8"?>
-<p:sld xmlns:a="http://schemas.openxmlformats.org/drawingml/2006/main" xmlns:p="http://schemas.openxmlformats.org/presentationml/2006/main" xmlns:r="http://schemas.openxmlformats.org/officeDocument/2006/relationships">
+<p:sld xmlns:a="http://schemas.openxmlformats.org/drawingml/2006/main" xmlns:r="http://schemas.openxmlformats.org/officeDocument/2006/relationships" xmlns:p="http://schemas.openxmlformats.org/presentationml/2006/main">
   <p:cSld>
     <p:bg>
       <p:bgPr>
@@ -5078,7 +5144,14 @@
         <p:cNvGrpSpPr/>
         <p:nvPr/>
       </p:nvGrpSpPr>
-      <p:grpSpPr/>
+      <p:grpSpPr>
+        <a:xfrm>
+          <a:off x="0" y="0"/>
+          <a:ext cx="0" cy="0"/>
+          <a:chOff x="0" y="0"/>
+          <a:chExt cx="0" cy="0"/>
+        </a:xfrm>
+      </p:grpSpPr>
       <p:sp>
         <p:nvSpPr>
           <p:cNvPr id="2" name="TextBox 1"/>
@@ -5124,7 +5197,7 @@
         <p:spPr>
           <a:xfrm>
             <a:off x="640080" y="1463040"/>
-            <a:ext cx="2514600" cy="1234440"/>
+            <a:ext cx="2514600" cy="1506302"/>
           </a:xfrm>
           <a:prstGeom prst="roundRect">
             <a:avLst>
@@ -5159,6 +5232,7 @@
           <a:lstStyle/>
           <a:p>
             <a:pPr algn="ctr"/>
+            <a:endParaRPr/>
           </a:p>
         </p:txBody>
       </p:sp>
@@ -5171,7 +5245,7 @@
         <p:spPr>
           <a:xfrm>
             <a:off x="3520440" y="1463040"/>
-            <a:ext cx="2514600" cy="1234440"/>
+            <a:ext cx="2514600" cy="1506302"/>
           </a:xfrm>
           <a:prstGeom prst="roundRect">
             <a:avLst>
@@ -5206,6 +5280,7 @@
           <a:lstStyle/>
           <a:p>
             <a:pPr algn="ctr"/>
+            <a:endParaRPr/>
           </a:p>
         </p:txBody>
       </p:sp>
@@ -5217,8 +5292,8 @@
         </p:nvSpPr>
         <p:spPr>
           <a:xfrm>
-            <a:off x="6400800" y="1463040"/>
-            <a:ext cx="2514600" cy="1234440"/>
+            <a:off x="6400800" y="1463039"/>
+            <a:ext cx="2514600" cy="1506301"/>
           </a:xfrm>
           <a:prstGeom prst="roundRect">
             <a:avLst>
@@ -5253,6 +5328,7 @@
           <a:lstStyle/>
           <a:p>
             <a:pPr algn="ctr"/>
+            <a:endParaRPr/>
           </a:p>
         </p:txBody>
       </p:sp>
@@ -5264,8 +5340,8 @@
         </p:nvSpPr>
         <p:spPr>
           <a:xfrm>
-            <a:off x="9281160" y="1463040"/>
-            <a:ext cx="2240280" cy="1234440"/>
+            <a:off x="9281160" y="1463039"/>
+            <a:ext cx="2240280" cy="1417321"/>
           </a:xfrm>
           <a:prstGeom prst="roundRect">
             <a:avLst>
@@ -5300,6 +5376,7 @@
           <a:lstStyle/>
           <a:p>
             <a:pPr algn="ctr"/>
+            <a:endParaRPr/>
           </a:p>
         </p:txBody>
       </p:sp>
@@ -5639,7 +5716,7 @@
 </file>
 
 <file path=ppt/slides/slide5.xml><?xml version="1.0" encoding="utf-8"?>
-<p:sld xmlns:a="http://schemas.openxmlformats.org/drawingml/2006/main" xmlns:p="http://schemas.openxmlformats.org/presentationml/2006/main" xmlns:r="http://schemas.openxmlformats.org/officeDocument/2006/relationships">
+<p:sld xmlns:a="http://schemas.openxmlformats.org/drawingml/2006/main" xmlns:r="http://schemas.openxmlformats.org/officeDocument/2006/relationships" xmlns:p="http://schemas.openxmlformats.org/presentationml/2006/main">
   <p:cSld>
     <p:bg>
       <p:bgPr>
@@ -5655,7 +5732,14 @@
         <p:cNvGrpSpPr/>
         <p:nvPr/>
       </p:nvGrpSpPr>
-      <p:grpSpPr/>
+      <p:grpSpPr>
+        <a:xfrm>
+          <a:off x="0" y="0"/>
+          <a:ext cx="0" cy="0"/>
+          <a:chOff x="0" y="0"/>
+          <a:chExt cx="0" cy="0"/>
+        </a:xfrm>
+      </p:grpSpPr>
       <p:sp>
         <p:nvSpPr>
           <p:cNvPr id="2" name="TextBox 1"/>
@@ -5701,7 +5785,7 @@
         <p:spPr>
           <a:xfrm>
             <a:off x="685800" y="1143000"/>
-            <a:ext cx="4663440" cy="4297680"/>
+            <a:ext cx="10808110" cy="1220847"/>
           </a:xfrm>
           <a:prstGeom prst="rect">
             <a:avLst/>
@@ -5726,7 +5810,12 @@
               </a:defRPr>
             </a:pPr>
             <a:r>
-              <a:t>VadCLIP adapts CLIP to weakly supervised video anomaly detection.</a:t>
+              <a:rPr dirty="0" err="1"/>
+              <a:t>VadCLIP</a:t>
+            </a:r>
+            <a:r>
+              <a:rPr dirty="0"/>
+              <a:t> adapts CLIP to weakly supervised video anomaly detection.</a:t>
             </a:r>
           </a:p>
           <a:p>
@@ -5742,6 +5831,7 @@
               </a:defRPr>
             </a:pPr>
             <a:r>
+              <a:rPr dirty="0"/>
               <a:t>It keeps the binary detection task, but adds semantic alignment between video and text.</a:t>
             </a:r>
           </a:p>
@@ -5758,6 +5848,7 @@
               </a:defRPr>
             </a:pPr>
             <a:r>
+              <a:rPr dirty="0"/>
               <a:t>This makes it a bridge between MIL-based WSVAD and open-vocabulary anomaly understanding.</a:t>
             </a:r>
           </a:p>
@@ -5779,8 +5870,8 @@
         </p:blipFill>
         <p:spPr>
           <a:xfrm>
-            <a:off x="5532120" y="1170432"/>
-            <a:ext cx="5486400" cy="3429000"/>
+            <a:off x="2541638" y="2363847"/>
+            <a:ext cx="7108723" cy="4442952"/>
           </a:xfrm>
           <a:prstGeom prst="rect">
             <a:avLst/>
@@ -5796,7 +5887,7 @@
 </file>
 
 <file path=ppt/slides/slide6.xml><?xml version="1.0" encoding="utf-8"?>
-<p:sld xmlns:a="http://schemas.openxmlformats.org/drawingml/2006/main" xmlns:p="http://schemas.openxmlformats.org/presentationml/2006/main" xmlns:r="http://schemas.openxmlformats.org/officeDocument/2006/relationships">
+<p:sld xmlns:a="http://schemas.openxmlformats.org/drawingml/2006/main" xmlns:r="http://schemas.openxmlformats.org/officeDocument/2006/relationships" xmlns:p="http://schemas.openxmlformats.org/presentationml/2006/main">
   <p:cSld>
     <p:bg>
       <p:bgPr>
@@ -5812,7 +5903,14 @@
         <p:cNvGrpSpPr/>
         <p:nvPr/>
       </p:nvGrpSpPr>
-      <p:grpSpPr/>
+      <p:grpSpPr>
+        <a:xfrm>
+          <a:off x="0" y="0"/>
+          <a:ext cx="0" cy="0"/>
+          <a:chOff x="0" y="0"/>
+          <a:chExt cx="0" cy="0"/>
+        </a:xfrm>
+      </p:grpSpPr>
       <p:sp>
         <p:nvSpPr>
           <p:cNvPr id="2" name="TextBox 1"/>
@@ -5858,7 +5956,7 @@
         <p:spPr>
           <a:xfrm>
             <a:off x="685800" y="1325880"/>
-            <a:ext cx="5394960" cy="3611880"/>
+            <a:ext cx="5257800" cy="3611880"/>
           </a:xfrm>
           <a:prstGeom prst="roundRect">
             <a:avLst>
@@ -5893,6 +5991,7 @@
           <a:lstStyle/>
           <a:p>
             <a:pPr algn="ctr"/>
+            <a:endParaRPr/>
           </a:p>
         </p:txBody>
       </p:sp>
@@ -5904,8 +6003,8 @@
         </p:nvSpPr>
         <p:spPr>
           <a:xfrm>
-            <a:off x="6126480" y="1325880"/>
-            <a:ext cx="5394960" cy="3611880"/>
+            <a:off x="6248402" y="1325880"/>
+            <a:ext cx="5273038" cy="3611880"/>
           </a:xfrm>
           <a:prstGeom prst="roundRect">
             <a:avLst>
@@ -5940,6 +6039,7 @@
           <a:lstStyle/>
           <a:p>
             <a:pPr algn="ctr"/>
+            <a:endParaRPr/>
           </a:p>
         </p:txBody>
       </p:sp>
@@ -6166,7 +6266,7 @@
 </file>
 
 <file path=ppt/slides/slide7.xml><?xml version="1.0" encoding="utf-8"?>
-<p:sld xmlns:a="http://schemas.openxmlformats.org/drawingml/2006/main" xmlns:p="http://schemas.openxmlformats.org/presentationml/2006/main" xmlns:r="http://schemas.openxmlformats.org/officeDocument/2006/relationships">
+<p:sld xmlns:a="http://schemas.openxmlformats.org/drawingml/2006/main" xmlns:r="http://schemas.openxmlformats.org/officeDocument/2006/relationships" xmlns:p="http://schemas.openxmlformats.org/presentationml/2006/main">
   <p:cSld>
     <p:bg>
       <p:bgPr>
@@ -6182,7 +6282,14 @@
         <p:cNvGrpSpPr/>
         <p:nvPr/>
       </p:nvGrpSpPr>
-      <p:grpSpPr/>
+      <p:grpSpPr>
+        <a:xfrm>
+          <a:off x="0" y="0"/>
+          <a:ext cx="0" cy="0"/>
+          <a:chOff x="0" y="0"/>
+          <a:chExt cx="0" cy="0"/>
+        </a:xfrm>
+      </p:grpSpPr>
       <p:sp>
         <p:nvSpPr>
           <p:cNvPr id="2" name="TextBox 1"/>
@@ -6339,7 +6446,7 @@
 </file>
 
 <file path=ppt/slides/slide8.xml><?xml version="1.0" encoding="utf-8"?>
-<p:sld xmlns:a="http://schemas.openxmlformats.org/drawingml/2006/main" xmlns:p="http://schemas.openxmlformats.org/presentationml/2006/main" xmlns:r="http://schemas.openxmlformats.org/officeDocument/2006/relationships">
+<p:sld xmlns:a="http://schemas.openxmlformats.org/drawingml/2006/main" xmlns:r="http://schemas.openxmlformats.org/officeDocument/2006/relationships" xmlns:p="http://schemas.openxmlformats.org/presentationml/2006/main">
   <p:cSld>
     <p:bg>
       <p:bgPr>
@@ -6355,7 +6462,14 @@
         <p:cNvGrpSpPr/>
         <p:nvPr/>
       </p:nvGrpSpPr>
-      <p:grpSpPr/>
+      <p:grpSpPr>
+        <a:xfrm>
+          <a:off x="0" y="0"/>
+          <a:ext cx="0" cy="0"/>
+          <a:chOff x="0" y="0"/>
+          <a:chExt cx="0" cy="0"/>
+        </a:xfrm>
+      </p:grpSpPr>
       <p:sp>
         <p:nvSpPr>
           <p:cNvPr id="2" name="TextBox 1"/>
@@ -6436,6 +6550,7 @@
           <a:lstStyle/>
           <a:p>
             <a:pPr algn="ctr"/>
+            <a:endParaRPr/>
           </a:p>
         </p:txBody>
       </p:sp>
@@ -6483,6 +6598,7 @@
           <a:lstStyle/>
           <a:p>
             <a:pPr algn="ctr"/>
+            <a:endParaRPr/>
           </a:p>
         </p:txBody>
       </p:sp>
@@ -6741,7 +6857,7 @@
 </file>
 
 <file path=ppt/slides/slide9.xml><?xml version="1.0" encoding="utf-8"?>
-<p:sld xmlns:a="http://schemas.openxmlformats.org/drawingml/2006/main" xmlns:p="http://schemas.openxmlformats.org/presentationml/2006/main" xmlns:r="http://schemas.openxmlformats.org/officeDocument/2006/relationships">
+<p:sld xmlns:a="http://schemas.openxmlformats.org/drawingml/2006/main" xmlns:r="http://schemas.openxmlformats.org/officeDocument/2006/relationships" xmlns:p="http://schemas.openxmlformats.org/presentationml/2006/main">
   <p:cSld>
     <p:bg>
       <p:bgPr>
@@ -6757,7 +6873,14 @@
         <p:cNvGrpSpPr/>
         <p:nvPr/>
       </p:nvGrpSpPr>
-      <p:grpSpPr/>
+      <p:grpSpPr>
+        <a:xfrm>
+          <a:off x="0" y="0"/>
+          <a:ext cx="0" cy="0"/>
+          <a:chOff x="0" y="0"/>
+          <a:chExt cx="0" cy="0"/>
+        </a:xfrm>
+      </p:grpSpPr>
       <p:sp>
         <p:nvSpPr>
           <p:cNvPr id="2" name="TextBox 1"/>
@@ -6909,6 +7032,7 @@
           <a:lstStyle/>
           <a:p>
             <a:pPr algn="ctr"/>
+            <a:endParaRPr/>
           </a:p>
         </p:txBody>
       </p:sp>

--- a/presentations/04_weekly_summary_open_vocabulary_vad_en.pptx
+++ b/presentations/04_weekly_summary_open_vocabulary_vad_en.pptx
@@ -13,13 +13,12 @@
     <p:sldId id="261" r:id="rId7"/>
     <p:sldId id="262" r:id="rId8"/>
     <p:sldId id="263" r:id="rId9"/>
-    <p:sldId id="264" r:id="rId10"/>
-    <p:sldId id="265" r:id="rId11"/>
-    <p:sldId id="266" r:id="rId12"/>
-    <p:sldId id="267" r:id="rId13"/>
-    <p:sldId id="268" r:id="rId14"/>
-    <p:sldId id="269" r:id="rId15"/>
-    <p:sldId id="270" r:id="rId16"/>
+    <p:sldId id="271" r:id="rId10"/>
+    <p:sldId id="266" r:id="rId11"/>
+    <p:sldId id="267" r:id="rId12"/>
+    <p:sldId id="268" r:id="rId13"/>
+    <p:sldId id="269" r:id="rId14"/>
+    <p:sldId id="270" r:id="rId15"/>
   </p:sldIdLst>
   <p:sldSz cx="12192000" cy="6858000"/>
   <p:notesSz cx="6858000" cy="9144000"/>
@@ -3411,7 +3410,7 @@
               </a:defRPr>
             </a:pPr>
             <a:r>
-              <a:t>Semantic Knowledge Injection</a:t>
+              <a:t>Novel Anomaly Synthesis</a:t>
             </a:r>
           </a:p>
         </p:txBody>
@@ -3425,7 +3424,7 @@
         <p:spPr>
           <a:xfrm>
             <a:off x="685800" y="1143000"/>
-            <a:ext cx="4663440" cy="4297680"/>
+            <a:ext cx="10424160" cy="4480560"/>
           </a:xfrm>
           <a:prstGeom prst="rect">
             <a:avLst/>
@@ -3442,7 +3441,7 @@
               <a:spcAft>
                 <a:spcPts val="800"/>
               </a:spcAft>
-              <a:defRPr sz="2000">
+              <a:defRPr sz="2200">
                 <a:solidFill>
                   <a:srgbClr val="4B5563"/>
                 </a:solidFill>
@@ -3450,7 +3449,7 @@
               </a:defRPr>
             </a:pPr>
             <a:r>
-              <a:t>SKI injects anomaly-related semantic knowledge from text into the visual stream.</a:t>
+              <a:t>NAS generates synthetic anomalies to help the model handle novel classes.</a:t>
             </a:r>
           </a:p>
           <a:p>
@@ -3458,7 +3457,7 @@
               <a:spcAft>
                 <a:spcPts val="800"/>
               </a:spcAft>
-              <a:defRPr sz="2000">
+              <a:defRPr sz="2200">
                 <a:solidFill>
                   <a:srgbClr val="4B5563"/>
                 </a:solidFill>
@@ -3466,7 +3465,7 @@
               </a:defRPr>
             </a:pPr>
             <a:r>
-              <a:t>This helps the model reason about what kind of event a frame is related to.</a:t>
+              <a:t>LLM-guided descriptions are turned into visual content and inserted into normal videos.</a:t>
             </a:r>
           </a:p>
           <a:p>
@@ -3474,7 +3473,7 @@
               <a:spcAft>
                 <a:spcPts val="800"/>
               </a:spcAft>
-              <a:defRPr sz="2000">
+              <a:defRPr sz="2200">
                 <a:solidFill>
                   <a:srgbClr val="4B5563"/>
                 </a:solidFill>
@@ -3482,14 +3481,20 @@
               </a:defRPr>
             </a:pPr>
             <a:r>
-              <a:t>It moves the method beyond pure binary detection.</a:t>
+              <a:t>This gives the model a way to see categories that were not present in the original training set.</a:t>
             </a:r>
           </a:p>
         </p:txBody>
       </p:sp>
       <p:pic>
         <p:nvPicPr>
-          <p:cNvPr id="4" name="Picture 3" descr="OVVAD_T1.png"/>
+          <p:cNvPr id="5" name="Imagen 4">
+            <a:extLst>
+              <a:ext uri="{FF2B5EF4-FFF2-40B4-BE49-F238E27FC236}">
+                <a16:creationId xmlns:a16="http://schemas.microsoft.com/office/drawing/2014/main" id="{31A2CCA8-665B-AFF3-D214-5F53290A62F2}"/>
+              </a:ext>
+            </a:extLst>
+          </p:cNvPr>
           <p:cNvPicPr>
             <a:picLocks noChangeAspect="1"/>
           </p:cNvPicPr>
@@ -3503,8 +3508,8 @@
         </p:blipFill>
         <p:spPr>
           <a:xfrm>
-            <a:off x="5623560" y="1188720"/>
-            <a:ext cx="5120640" cy="3291840"/>
+            <a:off x="594360" y="3428999"/>
+            <a:ext cx="10615578" cy="1782272"/>
           </a:xfrm>
           <a:prstGeom prst="rect">
             <a:avLst/>
@@ -3575,7 +3580,7 @@
               </a:defRPr>
             </a:pPr>
             <a:r>
-              <a:t>Novel Anomaly Synthesis</a:t>
+              <a:t>Results and Comparison</a:t>
             </a:r>
           </a:p>
         </p:txBody>
@@ -3588,8 +3593,8 @@
         </p:nvSpPr>
         <p:spPr>
           <a:xfrm>
-            <a:off x="685800" y="1143000"/>
-            <a:ext cx="10424160" cy="4480560"/>
+            <a:off x="685800" y="1097280"/>
+            <a:ext cx="10515600" cy="687368"/>
           </a:xfrm>
           <a:prstGeom prst="rect">
             <a:avLst/>
@@ -3606,7 +3611,7 @@
               <a:spcAft>
                 <a:spcPts val="800"/>
               </a:spcAft>
-              <a:defRPr sz="2200">
+              <a:defRPr sz="2000">
                 <a:solidFill>
                   <a:srgbClr val="4B5563"/>
                 </a:solidFill>
@@ -3614,7 +3619,8 @@
               </a:defRPr>
             </a:pPr>
             <a:r>
-              <a:t>NAS generates synthetic anomalies to help the model handle novel classes.</a:t>
+              <a:rPr sz="1600" dirty="0"/>
+              <a:t>The reported results show that the proposed method is competitive with closed-set baselines.</a:t>
             </a:r>
           </a:p>
           <a:p>
@@ -3622,7 +3628,7 @@
               <a:spcAft>
                 <a:spcPts val="800"/>
               </a:spcAft>
-              <a:defRPr sz="2200">
+              <a:defRPr sz="2000">
                 <a:solidFill>
                   <a:srgbClr val="4B5563"/>
                 </a:solidFill>
@@ -3630,27 +3636,36 @@
               </a:defRPr>
             </a:pPr>
             <a:r>
-              <a:t>LLM-guided descriptions are turned into visual content and inserted into normal videos.</a:t>
-            </a:r>
-          </a:p>
-          <a:p>
-            <a:pPr>
-              <a:spcAft>
-                <a:spcPts val="800"/>
-              </a:spcAft>
-              <a:defRPr sz="2200">
-                <a:solidFill>
-                  <a:srgbClr val="4B5563"/>
-                </a:solidFill>
-                <a:latin typeface="Aptos"/>
-              </a:defRPr>
-            </a:pPr>
-            <a:r>
-              <a:t>This gives the model a way to see categories that were not present in the original training set.</a:t>
-            </a:r>
-          </a:p>
-        </p:txBody>
-      </p:sp>
+              <a:rPr sz="1600" dirty="0"/>
+              <a:t>The gain is most relevant on novel anomaly categories, which is the main point of the open-vocabulary setting.</a:t>
+            </a:r>
+          </a:p>
+        </p:txBody>
+      </p:sp>
+      <p:pic>
+        <p:nvPicPr>
+          <p:cNvPr id="4" name="Picture 3" descr="OVVAD_TABLE1.png"/>
+          <p:cNvPicPr>
+            <a:picLocks noChangeAspect="1"/>
+          </p:cNvPicPr>
+          <p:nvPr/>
+        </p:nvPicPr>
+        <p:blipFill>
+          <a:blip r:embed="rId2"/>
+          <a:stretch>
+            <a:fillRect/>
+          </a:stretch>
+        </p:blipFill>
+        <p:spPr>
+          <a:xfrm>
+            <a:off x="594360" y="1784649"/>
+            <a:ext cx="10881360" cy="5067890"/>
+          </a:xfrm>
+          <a:prstGeom prst="rect">
+            <a:avLst/>
+          </a:prstGeom>
+        </p:spPr>
+      </p:pic>
     </p:spTree>
   </p:cSld>
   <p:clrMapOvr>
@@ -3715,21 +3730,378 @@
               </a:defRPr>
             </a:pPr>
             <a:r>
-              <a:t>Results and Comparison</a:t>
-            </a:r>
-          </a:p>
-        </p:txBody>
-      </p:sp>
-      <p:sp>
-        <p:nvSpPr>
-          <p:cNvPr id="3" name="TextBox 2"/>
+              <a:t>Evolution of Ideas</a:t>
+            </a:r>
+          </a:p>
+        </p:txBody>
+      </p:sp>
+      <p:grpSp>
+        <p:nvGrpSpPr>
+          <p:cNvPr id="14" name="Grupo 13">
+            <a:extLst>
+              <a:ext uri="{FF2B5EF4-FFF2-40B4-BE49-F238E27FC236}">
+                <a16:creationId xmlns:a16="http://schemas.microsoft.com/office/drawing/2014/main" id="{4939B5CF-6D2D-2EDD-E777-25557D759C3E}"/>
+              </a:ext>
+            </a:extLst>
+          </p:cNvPr>
+          <p:cNvGrpSpPr/>
+          <p:nvPr/>
+        </p:nvGrpSpPr>
+        <p:grpSpPr>
+          <a:xfrm>
+            <a:off x="1363980" y="1874519"/>
+            <a:ext cx="9464039" cy="1143000"/>
+            <a:chOff x="548640" y="1874519"/>
+            <a:chExt cx="9464039" cy="1143000"/>
+          </a:xfrm>
+        </p:grpSpPr>
+        <p:sp>
+          <p:nvSpPr>
+            <p:cNvPr id="3" name="Rounded Rectangle 2"/>
+            <p:cNvSpPr/>
+            <p:nvPr/>
+          </p:nvSpPr>
+          <p:spPr>
+            <a:xfrm>
+              <a:off x="548640" y="1874519"/>
+              <a:ext cx="2057400" cy="1143000"/>
+            </a:xfrm>
+            <a:prstGeom prst="roundRect">
+              <a:avLst>
+                <a:gd name="adj" fmla="val 8000"/>
+              </a:avLst>
+            </a:prstGeom>
+            <a:solidFill>
+              <a:srgbClr val="DBEAFE"/>
+            </a:solidFill>
+            <a:ln>
+              <a:solidFill>
+                <a:srgbClr val="DBEAFE"/>
+              </a:solidFill>
+            </a:ln>
+          </p:spPr>
+          <p:style>
+            <a:lnRef idx="1">
+              <a:schemeClr val="accent1"/>
+            </a:lnRef>
+            <a:fillRef idx="3">
+              <a:schemeClr val="accent1"/>
+            </a:fillRef>
+            <a:effectRef idx="2">
+              <a:schemeClr val="accent1"/>
+            </a:effectRef>
+            <a:fontRef idx="minor">
+              <a:schemeClr val="lt1"/>
+            </a:fontRef>
+          </p:style>
+          <p:txBody>
+            <a:bodyPr rtlCol="0" anchor="ctr"/>
+            <a:lstStyle/>
+            <a:p>
+              <a:pPr algn="ctr"/>
+              <a:endParaRPr/>
+            </a:p>
+          </p:txBody>
+        </p:sp>
+        <p:sp>
+          <p:nvSpPr>
+            <p:cNvPr id="4" name="Rounded Rectangle 3"/>
+            <p:cNvSpPr/>
+            <p:nvPr/>
+          </p:nvSpPr>
+          <p:spPr>
+            <a:xfrm>
+              <a:off x="3017520" y="1874519"/>
+              <a:ext cx="2057400" cy="1143000"/>
+            </a:xfrm>
+            <a:prstGeom prst="roundRect">
+              <a:avLst>
+                <a:gd name="adj" fmla="val 8000"/>
+              </a:avLst>
+            </a:prstGeom>
+            <a:solidFill>
+              <a:srgbClr val="D1FAE5"/>
+            </a:solidFill>
+            <a:ln>
+              <a:solidFill>
+                <a:srgbClr val="D1FAE5"/>
+              </a:solidFill>
+            </a:ln>
+          </p:spPr>
+          <p:style>
+            <a:lnRef idx="1">
+              <a:schemeClr val="accent1"/>
+            </a:lnRef>
+            <a:fillRef idx="3">
+              <a:schemeClr val="accent1"/>
+            </a:fillRef>
+            <a:effectRef idx="2">
+              <a:schemeClr val="accent1"/>
+            </a:effectRef>
+            <a:fontRef idx="minor">
+              <a:schemeClr val="lt1"/>
+            </a:fontRef>
+          </p:style>
+          <p:txBody>
+            <a:bodyPr rtlCol="0" anchor="ctr"/>
+            <a:lstStyle/>
+            <a:p>
+              <a:pPr algn="ctr"/>
+              <a:endParaRPr/>
+            </a:p>
+          </p:txBody>
+        </p:sp>
+        <p:sp>
+          <p:nvSpPr>
+            <p:cNvPr id="5" name="Rounded Rectangle 4"/>
+            <p:cNvSpPr/>
+            <p:nvPr/>
+          </p:nvSpPr>
+          <p:spPr>
+            <a:xfrm>
+              <a:off x="5486400" y="1874519"/>
+              <a:ext cx="2057400" cy="1143000"/>
+            </a:xfrm>
+            <a:prstGeom prst="roundRect">
+              <a:avLst>
+                <a:gd name="adj" fmla="val 8000"/>
+              </a:avLst>
+            </a:prstGeom>
+            <a:solidFill>
+              <a:srgbClr val="FEF3C7"/>
+            </a:solidFill>
+            <a:ln>
+              <a:solidFill>
+                <a:srgbClr val="FEF3C7"/>
+              </a:solidFill>
+            </a:ln>
+          </p:spPr>
+          <p:style>
+            <a:lnRef idx="1">
+              <a:schemeClr val="accent1"/>
+            </a:lnRef>
+            <a:fillRef idx="3">
+              <a:schemeClr val="accent1"/>
+            </a:fillRef>
+            <a:effectRef idx="2">
+              <a:schemeClr val="accent1"/>
+            </a:effectRef>
+            <a:fontRef idx="minor">
+              <a:schemeClr val="lt1"/>
+            </a:fontRef>
+          </p:style>
+          <p:txBody>
+            <a:bodyPr rtlCol="0" anchor="ctr"/>
+            <a:lstStyle/>
+            <a:p>
+              <a:pPr algn="ctr"/>
+              <a:endParaRPr/>
+            </a:p>
+          </p:txBody>
+        </p:sp>
+        <p:sp>
+          <p:nvSpPr>
+            <p:cNvPr id="6" name="Rounded Rectangle 5"/>
+            <p:cNvSpPr/>
+            <p:nvPr/>
+          </p:nvSpPr>
+          <p:spPr>
+            <a:xfrm>
+              <a:off x="7955279" y="1874519"/>
+              <a:ext cx="2057400" cy="1143000"/>
+            </a:xfrm>
+            <a:prstGeom prst="roundRect">
+              <a:avLst>
+                <a:gd name="adj" fmla="val 8000"/>
+              </a:avLst>
+            </a:prstGeom>
+            <a:solidFill>
+              <a:srgbClr val="E0F2FE"/>
+            </a:solidFill>
+            <a:ln>
+              <a:solidFill>
+                <a:srgbClr val="E0F2FE"/>
+              </a:solidFill>
+            </a:ln>
+          </p:spPr>
+          <p:style>
+            <a:lnRef idx="1">
+              <a:schemeClr val="accent1"/>
+            </a:lnRef>
+            <a:fillRef idx="3">
+              <a:schemeClr val="accent1"/>
+            </a:fillRef>
+            <a:effectRef idx="2">
+              <a:schemeClr val="accent1"/>
+            </a:effectRef>
+            <a:fontRef idx="minor">
+              <a:schemeClr val="lt1"/>
+            </a:fontRef>
+          </p:style>
+          <p:txBody>
+            <a:bodyPr rtlCol="0" anchor="ctr"/>
+            <a:lstStyle/>
+            <a:p>
+              <a:pPr algn="ctr"/>
+              <a:endParaRPr/>
+            </a:p>
+          </p:txBody>
+        </p:sp>
+        <p:sp>
+          <p:nvSpPr>
+            <p:cNvPr id="8" name="TextBox 7"/>
+            <p:cNvSpPr txBox="1"/>
+            <p:nvPr/>
+          </p:nvSpPr>
+          <p:spPr>
+            <a:xfrm>
+              <a:off x="777240" y="2221992"/>
+              <a:ext cx="1554480" cy="365760"/>
+            </a:xfrm>
+            <a:prstGeom prst="rect">
+              <a:avLst/>
+            </a:prstGeom>
+            <a:noFill/>
+          </p:spPr>
+          <p:txBody>
+            <a:bodyPr wrap="square">
+              <a:spAutoFit/>
+            </a:bodyPr>
+            <a:lstStyle/>
+            <a:p>
+              <a:pPr algn="ctr">
+                <a:defRPr sz="2000" b="1">
+                  <a:solidFill>
+                    <a:srgbClr val="1D4ED8"/>
+                  </a:solidFill>
+                  <a:latin typeface="Aptos Display"/>
+                </a:defRPr>
+              </a:pPr>
+              <a:r>
+                <a:t>WSVAD</a:t>
+              </a:r>
+            </a:p>
+          </p:txBody>
+        </p:sp>
+        <p:sp>
+          <p:nvSpPr>
+            <p:cNvPr id="9" name="TextBox 8"/>
+            <p:cNvSpPr txBox="1"/>
+            <p:nvPr/>
+          </p:nvSpPr>
+          <p:spPr>
+            <a:xfrm>
+              <a:off x="3200400" y="2221992"/>
+              <a:ext cx="1600200" cy="365760"/>
+            </a:xfrm>
+            <a:prstGeom prst="rect">
+              <a:avLst/>
+            </a:prstGeom>
+            <a:noFill/>
+          </p:spPr>
+          <p:txBody>
+            <a:bodyPr wrap="square">
+              <a:spAutoFit/>
+            </a:bodyPr>
+            <a:lstStyle/>
+            <a:p>
+              <a:pPr algn="ctr">
+                <a:defRPr sz="2000" b="1">
+                  <a:solidFill>
+                    <a:srgbClr val="047857"/>
+                  </a:solidFill>
+                  <a:latin typeface="Aptos Display"/>
+                </a:defRPr>
+              </a:pPr>
+              <a:r>
+                <a:t>VadCLIP</a:t>
+              </a:r>
+            </a:p>
+          </p:txBody>
+        </p:sp>
+        <p:sp>
+          <p:nvSpPr>
+            <p:cNvPr id="10" name="TextBox 9"/>
+            <p:cNvSpPr txBox="1"/>
+            <p:nvPr/>
+          </p:nvSpPr>
+          <p:spPr>
+            <a:xfrm>
+              <a:off x="5669280" y="2221992"/>
+              <a:ext cx="1600200" cy="365760"/>
+            </a:xfrm>
+            <a:prstGeom prst="rect">
+              <a:avLst/>
+            </a:prstGeom>
+            <a:noFill/>
+          </p:spPr>
+          <p:txBody>
+            <a:bodyPr wrap="square">
+              <a:spAutoFit/>
+            </a:bodyPr>
+            <a:lstStyle/>
+            <a:p>
+              <a:pPr algn="ctr">
+                <a:defRPr sz="2000" b="1">
+                  <a:solidFill>
+                    <a:srgbClr val="B45309"/>
+                  </a:solidFill>
+                  <a:latin typeface="Aptos Display"/>
+                </a:defRPr>
+              </a:pPr>
+              <a:r>
+                <a:t>Open-Set</a:t>
+              </a:r>
+            </a:p>
+          </p:txBody>
+        </p:sp>
+        <p:sp>
+          <p:nvSpPr>
+            <p:cNvPr id="11" name="TextBox 10"/>
+            <p:cNvSpPr txBox="1"/>
+            <p:nvPr/>
+          </p:nvSpPr>
+          <p:spPr>
+            <a:xfrm>
+              <a:off x="8092440" y="2221992"/>
+              <a:ext cx="1600200" cy="365760"/>
+            </a:xfrm>
+            <a:prstGeom prst="rect">
+              <a:avLst/>
+            </a:prstGeom>
+            <a:noFill/>
+          </p:spPr>
+          <p:txBody>
+            <a:bodyPr wrap="square">
+              <a:spAutoFit/>
+            </a:bodyPr>
+            <a:lstStyle/>
+            <a:p>
+              <a:pPr algn="ctr">
+                <a:defRPr sz="2000" b="1">
+                  <a:solidFill>
+                    <a:srgbClr val="075985"/>
+                  </a:solidFill>
+                  <a:latin typeface="Aptos Display"/>
+                </a:defRPr>
+              </a:pPr>
+              <a:r>
+                <a:t>OV-VAD</a:t>
+              </a:r>
+            </a:p>
+          </p:txBody>
+        </p:sp>
+      </p:grpSp>
+      <p:sp>
+        <p:nvSpPr>
+          <p:cNvPr id="13" name="TextBox 12"/>
           <p:cNvSpPr txBox="1"/>
           <p:nvPr/>
         </p:nvSpPr>
         <p:spPr>
           <a:xfrm>
-            <a:off x="685800" y="1097280"/>
-            <a:ext cx="10515600" cy="1234440"/>
+            <a:off x="914400" y="3749039"/>
+            <a:ext cx="10332720" cy="1645920"/>
           </a:xfrm>
           <a:prstGeom prst="rect">
             <a:avLst/>
@@ -3746,7 +4118,7 @@
               <a:spcAft>
                 <a:spcPts val="800"/>
               </a:spcAft>
-              <a:defRPr sz="2000">
+              <a:defRPr sz="2100">
                 <a:solidFill>
                   <a:srgbClr val="4B5563"/>
                 </a:solidFill>
@@ -3754,7 +4126,7 @@
               </a:defRPr>
             </a:pPr>
             <a:r>
-              <a:t>The reported results show that the proposed method is competitive with closed-set baselines.</a:t>
+              <a:t>From weakly supervised anomaly localization.</a:t>
             </a:r>
           </a:p>
           <a:p>
@@ -3762,7 +4134,7 @@
               <a:spcAft>
                 <a:spcPts val="800"/>
               </a:spcAft>
-              <a:defRPr sz="2000">
+              <a:defRPr sz="2100">
                 <a:solidFill>
                   <a:srgbClr val="4B5563"/>
                 </a:solidFill>
@@ -3770,35 +4142,43 @@
               </a:defRPr>
             </a:pPr>
             <a:r>
-              <a:t>The gain is most relevant on novel anomaly categories, which is the main point of the open-vocabulary setting.</a:t>
-            </a:r>
-          </a:p>
-        </p:txBody>
-      </p:sp>
-      <p:pic>
-        <p:nvPicPr>
-          <p:cNvPr id="4" name="Picture 3" descr="OVVAD_TABLE1.png"/>
-          <p:cNvPicPr>
-            <a:picLocks noChangeAspect="1"/>
-          </p:cNvPicPr>
-          <p:nvPr/>
-        </p:nvPicPr>
-        <p:blipFill>
-          <a:blip r:embed="rId2"/>
-          <a:stretch>
-            <a:fillRect/>
-          </a:stretch>
-        </p:blipFill>
-        <p:spPr>
-          <a:xfrm>
-            <a:off x="731520" y="2148840"/>
-            <a:ext cx="10881360" cy="3291840"/>
-          </a:xfrm>
-          <a:prstGeom prst="rect">
-            <a:avLst/>
-          </a:prstGeom>
-        </p:spPr>
-      </p:pic>
+              <a:t>To CLIP-based visual-language anomaly modeling.</a:t>
+            </a:r>
+          </a:p>
+          <a:p>
+            <a:pPr>
+              <a:spcAft>
+                <a:spcPts val="800"/>
+              </a:spcAft>
+              <a:defRPr sz="2100">
+                <a:solidFill>
+                  <a:srgbClr val="4B5563"/>
+                </a:solidFill>
+                <a:latin typeface="Aptos"/>
+              </a:defRPr>
+            </a:pPr>
+            <a:r>
+              <a:t>To open-set generalization.</a:t>
+            </a:r>
+          </a:p>
+          <a:p>
+            <a:pPr>
+              <a:spcAft>
+                <a:spcPts val="800"/>
+              </a:spcAft>
+              <a:defRPr sz="2100">
+                <a:solidFill>
+                  <a:srgbClr val="4B5563"/>
+                </a:solidFill>
+                <a:latin typeface="Aptos"/>
+              </a:defRPr>
+            </a:pPr>
+            <a:r>
+              <a:t>To open-vocabulary detection and semantic categorization.</a:t>
+            </a:r>
+          </a:p>
+        </p:txBody>
+      </p:sp>
     </p:spTree>
   </p:cSld>
   <p:clrMapOvr>
@@ -3863,261 +4243,21 @@
               </a:defRPr>
             </a:pPr>
             <a:r>
-              <a:t>Evolution of Ideas</a:t>
-            </a:r>
-          </a:p>
-        </p:txBody>
-      </p:sp>
-      <p:sp>
-        <p:nvSpPr>
-          <p:cNvPr id="3" name="Rounded Rectangle 2"/>
-          <p:cNvSpPr/>
-          <p:nvPr/>
-        </p:nvSpPr>
-        <p:spPr>
-          <a:xfrm>
-            <a:off x="548640" y="1874519"/>
-            <a:ext cx="2057400" cy="1143000"/>
-          </a:xfrm>
-          <a:prstGeom prst="roundRect">
-            <a:avLst>
-              <a:gd name="adj" fmla="val 8000"/>
-            </a:avLst>
-          </a:prstGeom>
-          <a:solidFill>
-            <a:srgbClr val="DBEAFE"/>
-          </a:solidFill>
-          <a:ln>
-            <a:solidFill>
-              <a:srgbClr val="DBEAFE"/>
-            </a:solidFill>
-          </a:ln>
-        </p:spPr>
-        <p:style>
-          <a:lnRef idx="1">
-            <a:schemeClr val="accent1"/>
-          </a:lnRef>
-          <a:fillRef idx="3">
-            <a:schemeClr val="accent1"/>
-          </a:fillRef>
-          <a:effectRef idx="2">
-            <a:schemeClr val="accent1"/>
-          </a:effectRef>
-          <a:fontRef idx="minor">
-            <a:schemeClr val="lt1"/>
-          </a:fontRef>
-        </p:style>
-        <p:txBody>
-          <a:bodyPr rtlCol="0" anchor="ctr"/>
-          <a:lstStyle/>
-          <a:p>
-            <a:pPr algn="ctr"/>
-            <a:endParaRPr/>
-          </a:p>
-        </p:txBody>
-      </p:sp>
-      <p:sp>
-        <p:nvSpPr>
-          <p:cNvPr id="4" name="Rounded Rectangle 3"/>
-          <p:cNvSpPr/>
-          <p:nvPr/>
-        </p:nvSpPr>
-        <p:spPr>
-          <a:xfrm>
-            <a:off x="3017520" y="1874519"/>
-            <a:ext cx="2057400" cy="1143000"/>
-          </a:xfrm>
-          <a:prstGeom prst="roundRect">
-            <a:avLst>
-              <a:gd name="adj" fmla="val 8000"/>
-            </a:avLst>
-          </a:prstGeom>
-          <a:solidFill>
-            <a:srgbClr val="D1FAE5"/>
-          </a:solidFill>
-          <a:ln>
-            <a:solidFill>
-              <a:srgbClr val="D1FAE5"/>
-            </a:solidFill>
-          </a:ln>
-        </p:spPr>
-        <p:style>
-          <a:lnRef idx="1">
-            <a:schemeClr val="accent1"/>
-          </a:lnRef>
-          <a:fillRef idx="3">
-            <a:schemeClr val="accent1"/>
-          </a:fillRef>
-          <a:effectRef idx="2">
-            <a:schemeClr val="accent1"/>
-          </a:effectRef>
-          <a:fontRef idx="minor">
-            <a:schemeClr val="lt1"/>
-          </a:fontRef>
-        </p:style>
-        <p:txBody>
-          <a:bodyPr rtlCol="0" anchor="ctr"/>
-          <a:lstStyle/>
-          <a:p>
-            <a:pPr algn="ctr"/>
-            <a:endParaRPr/>
-          </a:p>
-        </p:txBody>
-      </p:sp>
-      <p:sp>
-        <p:nvSpPr>
-          <p:cNvPr id="5" name="Rounded Rectangle 4"/>
-          <p:cNvSpPr/>
-          <p:nvPr/>
-        </p:nvSpPr>
-        <p:spPr>
-          <a:xfrm>
-            <a:off x="5486400" y="1874519"/>
-            <a:ext cx="2057400" cy="1143000"/>
-          </a:xfrm>
-          <a:prstGeom prst="roundRect">
-            <a:avLst>
-              <a:gd name="adj" fmla="val 8000"/>
-            </a:avLst>
-          </a:prstGeom>
-          <a:solidFill>
-            <a:srgbClr val="FEF3C7"/>
-          </a:solidFill>
-          <a:ln>
-            <a:solidFill>
-              <a:srgbClr val="FEF3C7"/>
-            </a:solidFill>
-          </a:ln>
-        </p:spPr>
-        <p:style>
-          <a:lnRef idx="1">
-            <a:schemeClr val="accent1"/>
-          </a:lnRef>
-          <a:fillRef idx="3">
-            <a:schemeClr val="accent1"/>
-          </a:fillRef>
-          <a:effectRef idx="2">
-            <a:schemeClr val="accent1"/>
-          </a:effectRef>
-          <a:fontRef idx="minor">
-            <a:schemeClr val="lt1"/>
-          </a:fontRef>
-        </p:style>
-        <p:txBody>
-          <a:bodyPr rtlCol="0" anchor="ctr"/>
-          <a:lstStyle/>
-          <a:p>
-            <a:pPr algn="ctr"/>
-            <a:endParaRPr/>
-          </a:p>
-        </p:txBody>
-      </p:sp>
-      <p:sp>
-        <p:nvSpPr>
-          <p:cNvPr id="6" name="Rounded Rectangle 5"/>
-          <p:cNvSpPr/>
-          <p:nvPr/>
-        </p:nvSpPr>
-        <p:spPr>
-          <a:xfrm>
-            <a:off x="7955279" y="1874519"/>
-            <a:ext cx="2057400" cy="1143000"/>
-          </a:xfrm>
-          <a:prstGeom prst="roundRect">
-            <a:avLst>
-              <a:gd name="adj" fmla="val 8000"/>
-            </a:avLst>
-          </a:prstGeom>
-          <a:solidFill>
-            <a:srgbClr val="E0F2FE"/>
-          </a:solidFill>
-          <a:ln>
-            <a:solidFill>
-              <a:srgbClr val="E0F2FE"/>
-            </a:solidFill>
-          </a:ln>
-        </p:spPr>
-        <p:style>
-          <a:lnRef idx="1">
-            <a:schemeClr val="accent1"/>
-          </a:lnRef>
-          <a:fillRef idx="3">
-            <a:schemeClr val="accent1"/>
-          </a:fillRef>
-          <a:effectRef idx="2">
-            <a:schemeClr val="accent1"/>
-          </a:effectRef>
-          <a:fontRef idx="minor">
-            <a:schemeClr val="lt1"/>
-          </a:fontRef>
-        </p:style>
-        <p:txBody>
-          <a:bodyPr rtlCol="0" anchor="ctr"/>
-          <a:lstStyle/>
-          <a:p>
-            <a:pPr algn="ctr"/>
-            <a:endParaRPr/>
-          </a:p>
-        </p:txBody>
-      </p:sp>
-      <p:sp>
-        <p:nvSpPr>
-          <p:cNvPr id="7" name="Rounded Rectangle 6"/>
-          <p:cNvSpPr/>
-          <p:nvPr/>
-        </p:nvSpPr>
-        <p:spPr>
-          <a:xfrm>
-            <a:off x="10424160" y="1874519"/>
-            <a:ext cx="1325880" cy="1143000"/>
-          </a:xfrm>
-          <a:prstGeom prst="roundRect">
-            <a:avLst>
-              <a:gd name="adj" fmla="val 8000"/>
-            </a:avLst>
-          </a:prstGeom>
-          <a:solidFill>
-            <a:srgbClr val="FFE4E6"/>
-          </a:solidFill>
-          <a:ln>
-            <a:solidFill>
-              <a:srgbClr val="FFE4E6"/>
-            </a:solidFill>
-          </a:ln>
-        </p:spPr>
-        <p:style>
-          <a:lnRef idx="1">
-            <a:schemeClr val="accent1"/>
-          </a:lnRef>
-          <a:fillRef idx="3">
-            <a:schemeClr val="accent1"/>
-          </a:fillRef>
-          <a:effectRef idx="2">
-            <a:schemeClr val="accent1"/>
-          </a:effectRef>
-          <a:fontRef idx="minor">
-            <a:schemeClr val="lt1"/>
-          </a:fontRef>
-        </p:style>
-        <p:txBody>
-          <a:bodyPr rtlCol="0" anchor="ctr"/>
-          <a:lstStyle/>
-          <a:p>
-            <a:pPr algn="ctr"/>
-            <a:endParaRPr/>
-          </a:p>
-        </p:txBody>
-      </p:sp>
-      <p:sp>
-        <p:nvSpPr>
-          <p:cNvPr id="8" name="TextBox 7"/>
+              <a:t>What Is Already in Place</a:t>
+            </a:r>
+          </a:p>
+        </p:txBody>
+      </p:sp>
+      <p:sp>
+        <p:nvSpPr>
+          <p:cNvPr id="3" name="TextBox 2"/>
           <p:cNvSpPr txBox="1"/>
           <p:nvPr/>
         </p:nvSpPr>
         <p:spPr>
           <a:xfrm>
-            <a:off x="777240" y="2221992"/>
-            <a:ext cx="1554480" cy="365760"/>
+            <a:off x="777240" y="1188720"/>
+            <a:ext cx="10424160" cy="4389120"/>
           </a:xfrm>
           <a:prstGeom prst="rect">
             <a:avLst/>
@@ -4130,191 +4270,11 @@
           </a:bodyPr>
           <a:lstStyle/>
           <a:p>
-            <a:pPr algn="ctr">
-              <a:defRPr sz="2000" b="1">
-                <a:solidFill>
-                  <a:srgbClr val="1D4ED8"/>
-                </a:solidFill>
-                <a:latin typeface="Aptos Display"/>
-              </a:defRPr>
-            </a:pPr>
-            <a:r>
-              <a:t>WSVAD</a:t>
-            </a:r>
-          </a:p>
-        </p:txBody>
-      </p:sp>
-      <p:sp>
-        <p:nvSpPr>
-          <p:cNvPr id="9" name="TextBox 8"/>
-          <p:cNvSpPr txBox="1"/>
-          <p:nvPr/>
-        </p:nvSpPr>
-        <p:spPr>
-          <a:xfrm>
-            <a:off x="3200400" y="2221992"/>
-            <a:ext cx="1600200" cy="365760"/>
-          </a:xfrm>
-          <a:prstGeom prst="rect">
-            <a:avLst/>
-          </a:prstGeom>
-          <a:noFill/>
-        </p:spPr>
-        <p:txBody>
-          <a:bodyPr wrap="square">
-            <a:spAutoFit/>
-          </a:bodyPr>
-          <a:lstStyle/>
-          <a:p>
-            <a:pPr algn="ctr">
-              <a:defRPr sz="2000" b="1">
-                <a:solidFill>
-                  <a:srgbClr val="047857"/>
-                </a:solidFill>
-                <a:latin typeface="Aptos Display"/>
-              </a:defRPr>
-            </a:pPr>
-            <a:r>
-              <a:t>VadCLIP</a:t>
-            </a:r>
-          </a:p>
-        </p:txBody>
-      </p:sp>
-      <p:sp>
-        <p:nvSpPr>
-          <p:cNvPr id="10" name="TextBox 9"/>
-          <p:cNvSpPr txBox="1"/>
-          <p:nvPr/>
-        </p:nvSpPr>
-        <p:spPr>
-          <a:xfrm>
-            <a:off x="5669280" y="2221992"/>
-            <a:ext cx="1600200" cy="365760"/>
-          </a:xfrm>
-          <a:prstGeom prst="rect">
-            <a:avLst/>
-          </a:prstGeom>
-          <a:noFill/>
-        </p:spPr>
-        <p:txBody>
-          <a:bodyPr wrap="square">
-            <a:spAutoFit/>
-          </a:bodyPr>
-          <a:lstStyle/>
-          <a:p>
-            <a:pPr algn="ctr">
-              <a:defRPr sz="2000" b="1">
-                <a:solidFill>
-                  <a:srgbClr val="B45309"/>
-                </a:solidFill>
-                <a:latin typeface="Aptos Display"/>
-              </a:defRPr>
-            </a:pPr>
-            <a:r>
-              <a:t>Open-Set</a:t>
-            </a:r>
-          </a:p>
-        </p:txBody>
-      </p:sp>
-      <p:sp>
-        <p:nvSpPr>
-          <p:cNvPr id="11" name="TextBox 10"/>
-          <p:cNvSpPr txBox="1"/>
-          <p:nvPr/>
-        </p:nvSpPr>
-        <p:spPr>
-          <a:xfrm>
-            <a:off x="8092440" y="2221992"/>
-            <a:ext cx="1600200" cy="365760"/>
-          </a:xfrm>
-          <a:prstGeom prst="rect">
-            <a:avLst/>
-          </a:prstGeom>
-          <a:noFill/>
-        </p:spPr>
-        <p:txBody>
-          <a:bodyPr wrap="square">
-            <a:spAutoFit/>
-          </a:bodyPr>
-          <a:lstStyle/>
-          <a:p>
-            <a:pPr algn="ctr">
-              <a:defRPr sz="2000" b="1">
-                <a:solidFill>
-                  <a:srgbClr val="075985"/>
-                </a:solidFill>
-                <a:latin typeface="Aptos Display"/>
-              </a:defRPr>
-            </a:pPr>
-            <a:r>
-              <a:t>OV-VAD</a:t>
-            </a:r>
-          </a:p>
-        </p:txBody>
-      </p:sp>
-      <p:sp>
-        <p:nvSpPr>
-          <p:cNvPr id="12" name="TextBox 11"/>
-          <p:cNvSpPr txBox="1"/>
-          <p:nvPr/>
-        </p:nvSpPr>
-        <p:spPr>
-          <a:xfrm>
-            <a:off x="10561320" y="2221992"/>
-            <a:ext cx="1005840" cy="365760"/>
-          </a:xfrm>
-          <a:prstGeom prst="rect">
-            <a:avLst/>
-          </a:prstGeom>
-          <a:noFill/>
-        </p:spPr>
-        <p:txBody>
-          <a:bodyPr wrap="square">
-            <a:spAutoFit/>
-          </a:bodyPr>
-          <a:lstStyle/>
-          <a:p>
-            <a:pPr algn="ctr">
-              <a:defRPr sz="2000" b="1">
-                <a:solidFill>
-                  <a:srgbClr val="BE123C"/>
-                </a:solidFill>
-                <a:latin typeface="Aptos Display"/>
-              </a:defRPr>
-            </a:pPr>
-            <a:r>
-              <a:t>CLIP</a:t>
-            </a:r>
-          </a:p>
-        </p:txBody>
-      </p:sp>
-      <p:sp>
-        <p:nvSpPr>
-          <p:cNvPr id="13" name="TextBox 12"/>
-          <p:cNvSpPr txBox="1"/>
-          <p:nvPr/>
-        </p:nvSpPr>
-        <p:spPr>
-          <a:xfrm>
-            <a:off x="914400" y="3749039"/>
-            <a:ext cx="10332720" cy="1645920"/>
-          </a:xfrm>
-          <a:prstGeom prst="rect">
-            <a:avLst/>
-          </a:prstGeom>
-          <a:noFill/>
-        </p:spPr>
-        <p:txBody>
-          <a:bodyPr wrap="square">
-            <a:spAutoFit/>
-          </a:bodyPr>
-          <a:lstStyle/>
-          <a:p>
             <a:pPr>
               <a:spcAft>
                 <a:spcPts val="800"/>
               </a:spcAft>
-              <a:defRPr sz="2100">
+              <a:defRPr sz="2200">
                 <a:solidFill>
                   <a:srgbClr val="4B5563"/>
                 </a:solidFill>
@@ -4322,7 +4282,7 @@
               </a:defRPr>
             </a:pPr>
             <a:r>
-              <a:t>From weakly supervised anomaly localization.</a:t>
+              <a:t>A coherent path from action recognition to anomaly detection.</a:t>
             </a:r>
           </a:p>
           <a:p>
@@ -4330,7 +4290,7 @@
               <a:spcAft>
                 <a:spcPts val="800"/>
               </a:spcAft>
-              <a:defRPr sz="2100">
+              <a:defRPr sz="2200">
                 <a:solidFill>
                   <a:srgbClr val="4B5563"/>
                 </a:solidFill>
@@ -4338,7 +4298,7 @@
               </a:defRPr>
             </a:pPr>
             <a:r>
-              <a:t>To CLIP-based visual-language anomaly modeling.</a:t>
+              <a:t>A weakly supervised baseline centered on MIL-based reasoning.</a:t>
             </a:r>
           </a:p>
           <a:p>
@@ -4346,7 +4306,7 @@
               <a:spcAft>
                 <a:spcPts val="800"/>
               </a:spcAft>
-              <a:defRPr sz="2100">
+              <a:defRPr sz="2200">
                 <a:solidFill>
                   <a:srgbClr val="4B5563"/>
                 </a:solidFill>
@@ -4354,7 +4314,7 @@
               </a:defRPr>
             </a:pPr>
             <a:r>
-              <a:t>To open-set generalization.</a:t>
+              <a:t>A CLIP-based method that already connects visual and textual representations.</a:t>
             </a:r>
           </a:p>
           <a:p>
@@ -4362,7 +4322,7 @@
               <a:spcAft>
                 <a:spcPts val="800"/>
               </a:spcAft>
-              <a:defRPr sz="2100">
+              <a:defRPr sz="2200">
                 <a:solidFill>
                   <a:srgbClr val="4B5563"/>
                 </a:solidFill>
@@ -4370,7 +4330,7 @@
               </a:defRPr>
             </a:pPr>
             <a:r>
-              <a:t>To open-vocabulary detection and semantic categorization.</a:t>
+              <a:t>A clear next step toward open-vocabulary anomaly understanding.</a:t>
             </a:r>
           </a:p>
         </p:txBody>
@@ -4439,162 +4399,6 @@
               </a:defRPr>
             </a:pPr>
             <a:r>
-              <a:t>What Is Already in Place</a:t>
-            </a:r>
-          </a:p>
-        </p:txBody>
-      </p:sp>
-      <p:sp>
-        <p:nvSpPr>
-          <p:cNvPr id="3" name="TextBox 2"/>
-          <p:cNvSpPr txBox="1"/>
-          <p:nvPr/>
-        </p:nvSpPr>
-        <p:spPr>
-          <a:xfrm>
-            <a:off x="777240" y="1188720"/>
-            <a:ext cx="10424160" cy="4389120"/>
-          </a:xfrm>
-          <a:prstGeom prst="rect">
-            <a:avLst/>
-          </a:prstGeom>
-          <a:noFill/>
-        </p:spPr>
-        <p:txBody>
-          <a:bodyPr wrap="square">
-            <a:spAutoFit/>
-          </a:bodyPr>
-          <a:lstStyle/>
-          <a:p>
-            <a:pPr>
-              <a:spcAft>
-                <a:spcPts val="800"/>
-              </a:spcAft>
-              <a:defRPr sz="2200">
-                <a:solidFill>
-                  <a:srgbClr val="4B5563"/>
-                </a:solidFill>
-                <a:latin typeface="Aptos"/>
-              </a:defRPr>
-            </a:pPr>
-            <a:r>
-              <a:t>A coherent path from action recognition to anomaly detection.</a:t>
-            </a:r>
-          </a:p>
-          <a:p>
-            <a:pPr>
-              <a:spcAft>
-                <a:spcPts val="800"/>
-              </a:spcAft>
-              <a:defRPr sz="2200">
-                <a:solidFill>
-                  <a:srgbClr val="4B5563"/>
-                </a:solidFill>
-                <a:latin typeface="Aptos"/>
-              </a:defRPr>
-            </a:pPr>
-            <a:r>
-              <a:t>A weakly supervised baseline centered on MIL-based reasoning.</a:t>
-            </a:r>
-          </a:p>
-          <a:p>
-            <a:pPr>
-              <a:spcAft>
-                <a:spcPts val="800"/>
-              </a:spcAft>
-              <a:defRPr sz="2200">
-                <a:solidFill>
-                  <a:srgbClr val="4B5563"/>
-                </a:solidFill>
-                <a:latin typeface="Aptos"/>
-              </a:defRPr>
-            </a:pPr>
-            <a:r>
-              <a:t>A CLIP-based method that already connects visual and textual representations.</a:t>
-            </a:r>
-          </a:p>
-          <a:p>
-            <a:pPr>
-              <a:spcAft>
-                <a:spcPts val="800"/>
-              </a:spcAft>
-              <a:defRPr sz="2200">
-                <a:solidFill>
-                  <a:srgbClr val="4B5563"/>
-                </a:solidFill>
-                <a:latin typeface="Aptos"/>
-              </a:defRPr>
-            </a:pPr>
-            <a:r>
-              <a:t>A clear next step toward open-vocabulary anomaly understanding.</a:t>
-            </a:r>
-          </a:p>
-        </p:txBody>
-      </p:sp>
-    </p:spTree>
-  </p:cSld>
-  <p:clrMapOvr>
-    <a:masterClrMapping/>
-  </p:clrMapOvr>
-</p:sld>
-</file>
-
-<file path=ppt/slides/slide15.xml><?xml version="1.0" encoding="utf-8"?>
-<p:sld xmlns:a="http://schemas.openxmlformats.org/drawingml/2006/main" xmlns:r="http://schemas.openxmlformats.org/officeDocument/2006/relationships" xmlns:p="http://schemas.openxmlformats.org/presentationml/2006/main">
-  <p:cSld>
-    <p:bg>
-      <p:bgPr>
-        <a:solidFill>
-          <a:srgbClr val="F8FAFC"/>
-        </a:solidFill>
-        <a:effectLst/>
-      </p:bgPr>
-    </p:bg>
-    <p:spTree>
-      <p:nvGrpSpPr>
-        <p:cNvPr id="1" name=""/>
-        <p:cNvGrpSpPr/>
-        <p:nvPr/>
-      </p:nvGrpSpPr>
-      <p:grpSpPr>
-        <a:xfrm>
-          <a:off x="0" y="0"/>
-          <a:ext cx="0" cy="0"/>
-          <a:chOff x="0" y="0"/>
-          <a:chExt cx="0" cy="0"/>
-        </a:xfrm>
-      </p:grpSpPr>
-      <p:sp>
-        <p:nvSpPr>
-          <p:cNvPr id="2" name="TextBox 1"/>
-          <p:cNvSpPr txBox="1"/>
-          <p:nvPr/>
-        </p:nvSpPr>
-        <p:spPr>
-          <a:xfrm>
-            <a:off x="594360" y="384048"/>
-            <a:ext cx="10972800" cy="566928"/>
-          </a:xfrm>
-          <a:prstGeom prst="rect">
-            <a:avLst/>
-          </a:prstGeom>
-          <a:noFill/>
-        </p:spPr>
-        <p:txBody>
-          <a:bodyPr wrap="none">
-            <a:spAutoFit/>
-          </a:bodyPr>
-          <a:lstStyle/>
-          <a:p>
-            <a:pPr>
-              <a:defRPr sz="3000" b="1">
-                <a:solidFill>
-                  <a:srgbClr val="111827"/>
-                </a:solidFill>
-                <a:latin typeface="Aptos Display"/>
-              </a:defRPr>
-            </a:pPr>
-            <a:r>
               <a:t>Suggested Next Step</a:t>
             </a:r>
           </a:p>
@@ -5749,7 +5553,7 @@
         <p:spPr>
           <a:xfrm>
             <a:off x="594360" y="384048"/>
-            <a:ext cx="10972800" cy="566928"/>
+            <a:ext cx="2743251" cy="553998"/>
           </a:xfrm>
           <a:prstGeom prst="rect">
             <a:avLst/>
@@ -5771,8 +5575,14 @@
               </a:defRPr>
             </a:pPr>
             <a:r>
+              <a:rPr dirty="0" err="1"/>
               <a:t>VadCLIP</a:t>
             </a:r>
+            <a:r>
+              <a:rPr lang="es-MX" dirty="0"/>
+              <a:t> (2023)</a:t>
+            </a:r>
+            <a:endParaRPr dirty="0"/>
           </a:p>
         </p:txBody>
       </p:sp>
@@ -6299,7 +6109,7 @@
         <p:spPr>
           <a:xfrm>
             <a:off x="594360" y="384048"/>
-            <a:ext cx="10972800" cy="566928"/>
+            <a:ext cx="4981428" cy="553998"/>
           </a:xfrm>
           <a:prstGeom prst="rect">
             <a:avLst/>
@@ -6321,8 +6131,14 @@
               </a:defRPr>
             </a:pPr>
             <a:r>
+              <a:rPr dirty="0"/>
               <a:t>Open-Vocabulary VAD</a:t>
             </a:r>
+            <a:r>
+              <a:rPr lang="es-MX" dirty="0"/>
+              <a:t> (2024)</a:t>
+            </a:r>
+            <a:endParaRPr dirty="0"/>
           </a:p>
         </p:txBody>
       </p:sp>
@@ -6335,7 +6151,7 @@
         <p:spPr>
           <a:xfrm>
             <a:off x="685800" y="1143000"/>
-            <a:ext cx="4709160" cy="4297680"/>
+            <a:ext cx="10881360" cy="1631216"/>
           </a:xfrm>
           <a:prstGeom prst="rect">
             <a:avLst/>
@@ -6360,7 +6176,16 @@
               </a:defRPr>
             </a:pPr>
             <a:r>
-              <a:t>OV-VAD aims to detect anomalies and assign semantic labels to both seen and unseen categories.</a:t>
+              <a:rPr dirty="0"/>
+              <a:t>OV-VAD aims to detect anomalies and assign semantic labels to</a:t>
+            </a:r>
+            <a:r>
+              <a:rPr lang="es-MX" dirty="0"/>
+              <a:t> </a:t>
+            </a:r>
+            <a:r>
+              <a:rPr dirty="0"/>
+              <a:t>seen and unseen categories.</a:t>
             </a:r>
           </a:p>
           <a:p>
@@ -6376,6 +6201,7 @@
               </a:defRPr>
             </a:pPr>
             <a:r>
+              <a:rPr dirty="0"/>
               <a:t>The model is built on CLIP to reuse its image-text alignment capability.</a:t>
             </a:r>
           </a:p>
@@ -6392,6 +6218,7 @@
               </a:defRPr>
             </a:pPr>
             <a:r>
+              <a:rPr dirty="0"/>
               <a:t>The detection branch produces frame-level anomaly confidence scores.</a:t>
             </a:r>
           </a:p>
@@ -6408,6 +6235,7 @@
               </a:defRPr>
             </a:pPr>
             <a:r>
+              <a:rPr dirty="0"/>
               <a:t>The categorization branch matches video features with text embeddings.</a:t>
             </a:r>
           </a:p>
@@ -6429,8 +6257,8 @@
         </p:blipFill>
         <p:spPr>
           <a:xfrm>
-            <a:off x="5532120" y="1170432"/>
-            <a:ext cx="5486400" cy="3429000"/>
+            <a:off x="2794888" y="2674965"/>
+            <a:ext cx="6602224" cy="4126391"/>
           </a:xfrm>
           <a:prstGeom prst="rect">
             <a:avLst/>
@@ -6501,6 +6329,7 @@
               </a:defRPr>
             </a:pPr>
             <a:r>
+              <a:rPr dirty="0"/>
               <a:t>Overall Framework</a:t>
             </a:r>
           </a:p>
@@ -6515,7 +6344,7 @@
         <p:spPr>
           <a:xfrm>
             <a:off x="685800" y="1325880"/>
-            <a:ext cx="5394960" cy="3611880"/>
+            <a:ext cx="5299611" cy="3840480"/>
           </a:xfrm>
           <a:prstGeom prst="roundRect">
             <a:avLst>
@@ -6562,8 +6391,8 @@
         </p:nvSpPr>
         <p:spPr>
           <a:xfrm>
-            <a:off x="6126480" y="1325880"/>
-            <a:ext cx="5394960" cy="3611880"/>
+            <a:off x="6206590" y="1325880"/>
+            <a:ext cx="5314849" cy="3840480"/>
           </a:xfrm>
           <a:prstGeom prst="roundRect">
             <a:avLst>
@@ -6672,6 +6501,7 @@
               </a:defRPr>
             </a:pPr>
             <a:r>
+              <a:rPr dirty="0"/>
               <a:t>Video frames go through CLIP's image encoder.</a:t>
             </a:r>
           </a:p>
@@ -6688,6 +6518,7 @@
               </a:defRPr>
             </a:pPr>
             <a:r>
+              <a:rPr dirty="0"/>
               <a:t>Temporal Adapter injects video dynamics.</a:t>
             </a:r>
           </a:p>
@@ -6704,6 +6535,7 @@
               </a:defRPr>
             </a:pPr>
             <a:r>
+              <a:rPr dirty="0"/>
               <a:t>Semantic Knowledge Injection enriches visual features.</a:t>
             </a:r>
           </a:p>
@@ -6720,6 +6552,7 @@
               </a:defRPr>
             </a:pPr>
             <a:r>
+              <a:rPr dirty="0"/>
               <a:t>A binary detector outputs frame-level anomaly scores.</a:t>
             </a:r>
           </a:p>
@@ -6795,6 +6628,7 @@
               </a:defRPr>
             </a:pPr>
             <a:r>
+              <a:rPr dirty="0"/>
               <a:t>Video features are aggregated into a compact representation.</a:t>
             </a:r>
           </a:p>
@@ -6811,6 +6645,7 @@
               </a:defRPr>
             </a:pPr>
             <a:r>
+              <a:rPr dirty="0"/>
               <a:t>Category names are encoded with CLIP's text encoder.</a:t>
             </a:r>
           </a:p>
@@ -6827,6 +6662,7 @@
               </a:defRPr>
             </a:pPr>
             <a:r>
+              <a:rPr dirty="0"/>
               <a:t>Cross-modal alignment predicts the anomaly category.</a:t>
             </a:r>
           </a:p>
@@ -6843,6 +6679,7 @@
               </a:defRPr>
             </a:pPr>
             <a:r>
+              <a:rPr dirty="0"/>
               <a:t>This is the semantic layer that closed-set WSVAD lacks.</a:t>
             </a:r>
           </a:p>
@@ -6859,14 +6696,6 @@
 <file path=ppt/slides/slide9.xml><?xml version="1.0" encoding="utf-8"?>
 <p:sld xmlns:a="http://schemas.openxmlformats.org/drawingml/2006/main" xmlns:r="http://schemas.openxmlformats.org/officeDocument/2006/relationships" xmlns:p="http://schemas.openxmlformats.org/presentationml/2006/main">
   <p:cSld>
-    <p:bg>
-      <p:bgPr>
-        <a:solidFill>
-          <a:srgbClr val="F8FAFC"/>
-        </a:solidFill>
-        <a:effectLst/>
-      </p:bgPr>
-    </p:bg>
     <p:spTree>
       <p:nvGrpSpPr>
         <p:cNvPr id="1" name=""/>
@@ -6881,9 +6710,45 @@
           <a:chExt cx="0" cy="0"/>
         </a:xfrm>
       </p:grpSpPr>
-      <p:sp>
-        <p:nvSpPr>
-          <p:cNvPr id="2" name="TextBox 1"/>
+      <p:pic>
+        <p:nvPicPr>
+          <p:cNvPr id="3" name="Imagen 2">
+            <a:extLst>
+              <a:ext uri="{FF2B5EF4-FFF2-40B4-BE49-F238E27FC236}">
+                <a16:creationId xmlns:a16="http://schemas.microsoft.com/office/drawing/2014/main" id="{A5E3EB48-1021-0A3E-5FC0-DC7E857C6AB0}"/>
+              </a:ext>
+            </a:extLst>
+          </p:cNvPr>
+          <p:cNvPicPr>
+            <a:picLocks noChangeAspect="1"/>
+          </p:cNvPicPr>
+          <p:nvPr/>
+        </p:nvPicPr>
+        <p:blipFill>
+          <a:blip r:embed="rId2"/>
+          <a:stretch>
+            <a:fillRect/>
+          </a:stretch>
+        </p:blipFill>
+        <p:spPr>
+          <a:xfrm>
+            <a:off x="2204494" y="1121775"/>
+            <a:ext cx="7783011" cy="1571844"/>
+          </a:xfrm>
+          <a:prstGeom prst="rect">
+            <a:avLst/>
+          </a:prstGeom>
+        </p:spPr>
+      </p:pic>
+      <p:sp>
+        <p:nvSpPr>
+          <p:cNvPr id="4" name="TextBox 1">
+            <a:extLst>
+              <a:ext uri="{FF2B5EF4-FFF2-40B4-BE49-F238E27FC236}">
+                <a16:creationId xmlns:a16="http://schemas.microsoft.com/office/drawing/2014/main" id="{0AB664FF-2705-5A59-F030-656AA4DEC8B8}"/>
+              </a:ext>
+            </a:extLst>
+          </p:cNvPr>
           <p:cNvSpPr txBox="1"/>
           <p:nvPr/>
         </p:nvSpPr>
@@ -6912,91 +6777,21 @@
               </a:defRPr>
             </a:pPr>
             <a:r>
-              <a:t>Temporal Adapter</a:t>
-            </a:r>
-          </a:p>
-        </p:txBody>
-      </p:sp>
-      <p:sp>
-        <p:nvSpPr>
-          <p:cNvPr id="3" name="TextBox 2"/>
-          <p:cNvSpPr txBox="1"/>
-          <p:nvPr/>
-        </p:nvSpPr>
-        <p:spPr>
-          <a:xfrm>
-            <a:off x="685800" y="1143000"/>
-            <a:ext cx="4754880" cy="4297680"/>
-          </a:xfrm>
-          <a:prstGeom prst="rect">
-            <a:avLst/>
-          </a:prstGeom>
-          <a:noFill/>
-        </p:spPr>
-        <p:txBody>
-          <a:bodyPr wrap="square">
-            <a:spAutoFit/>
-          </a:bodyPr>
-          <a:lstStyle/>
-          <a:p>
-            <a:pPr>
-              <a:spcAft>
-                <a:spcPts val="800"/>
-              </a:spcAft>
-              <a:defRPr sz="2000">
-                <a:solidFill>
-                  <a:srgbClr val="4B5563"/>
-                </a:solidFill>
-                <a:latin typeface="Aptos"/>
-              </a:defRPr>
-            </a:pPr>
-            <a:r>
-              <a:t>The Temporal Adapter is designed to model frame-to-frame relationships with minimal extra parameters.</a:t>
-            </a:r>
-          </a:p>
-          <a:p>
-            <a:pPr>
-              <a:spcAft>
-                <a:spcPts val="800"/>
-              </a:spcAft>
-              <a:defRPr sz="2000">
-                <a:solidFill>
-                  <a:srgbClr val="4B5563"/>
-                </a:solidFill>
-                <a:latin typeface="Aptos"/>
-              </a:defRPr>
-            </a:pPr>
-            <a:r>
-              <a:t>It preserves CLIP's pretrained knowledge while adding temporal structure.</a:t>
-            </a:r>
-          </a:p>
-          <a:p>
-            <a:pPr>
-              <a:spcAft>
-                <a:spcPts val="800"/>
-              </a:spcAft>
-              <a:defRPr sz="2000">
-                <a:solidFill>
-                  <a:srgbClr val="4B5563"/>
-                </a:solidFill>
-                <a:latin typeface="Aptos"/>
-              </a:defRPr>
-            </a:pPr>
-            <a:r>
-              <a:t>The goal is to capture local temporal context without overfitting the seen anomaly classes.</a:t>
-            </a:r>
-          </a:p>
-        </p:txBody>
-      </p:sp>
-      <p:sp>
-        <p:nvSpPr>
-          <p:cNvPr id="4" name="Rounded Rectangle 3"/>
+              <a:rPr dirty="0"/>
+              <a:t>Overall Framework</a:t>
+            </a:r>
+          </a:p>
+        </p:txBody>
+      </p:sp>
+      <p:sp>
+        <p:nvSpPr>
+          <p:cNvPr id="5" name="Rounded Rectangle 3"/>
           <p:cNvSpPr/>
           <p:nvPr/>
         </p:nvSpPr>
         <p:spPr>
           <a:xfrm>
-            <a:off x="5806440" y="1234440"/>
+            <a:off x="594360" y="2999232"/>
             <a:ext cx="5394960" cy="3474720"/>
           </a:xfrm>
           <a:prstGeom prst="roundRect">
@@ -7038,14 +6833,14 @@
       </p:sp>
       <p:sp>
         <p:nvSpPr>
-          <p:cNvPr id="5" name="TextBox 4"/>
+          <p:cNvPr id="6" name="TextBox 4"/>
           <p:cNvSpPr txBox="1"/>
           <p:nvPr/>
         </p:nvSpPr>
         <p:spPr>
           <a:xfrm>
-            <a:off x="6172200" y="1627632"/>
-            <a:ext cx="4480560" cy="411480"/>
+            <a:off x="960120" y="3392424"/>
+            <a:ext cx="4480560" cy="492443"/>
           </a:xfrm>
           <a:prstGeom prst="rect">
             <a:avLst/>
@@ -7067,21 +6862,27 @@
               </a:defRPr>
             </a:pPr>
             <a:r>
-              <a:t>Main Role</a:t>
-            </a:r>
-          </a:p>
-        </p:txBody>
-      </p:sp>
-      <p:sp>
-        <p:nvSpPr>
-          <p:cNvPr id="6" name="TextBox 5"/>
+              <a:rPr lang="es-MX" altLang="ja-JP" dirty="0"/>
+              <a:t>Temporal </a:t>
+            </a:r>
+            <a:r>
+              <a:rPr lang="es-MX" altLang="ja-JP" dirty="0" err="1"/>
+              <a:t>Adapter</a:t>
+            </a:r>
+            <a:endParaRPr dirty="0"/>
+          </a:p>
+        </p:txBody>
+      </p:sp>
+      <p:sp>
+        <p:nvSpPr>
+          <p:cNvPr id="7" name="TextBox 5"/>
           <p:cNvSpPr txBox="1"/>
           <p:nvPr/>
         </p:nvSpPr>
         <p:spPr>
           <a:xfrm>
-            <a:off x="6172200" y="2286000"/>
-            <a:ext cx="4526280" cy="1600200"/>
+            <a:off x="960120" y="4050792"/>
+            <a:ext cx="4526280" cy="2123658"/>
           </a:xfrm>
           <a:prstGeom prst="rect">
             <a:avLst/>
@@ -7103,12 +6904,177 @@
               </a:defRPr>
             </a:pPr>
             <a:r>
-              <a:t>Bridge image features into a video-aware representation with a light temporal module rather than a heavy video transformer.</a:t>
-            </a:r>
+              <a:rPr lang="en-US" altLang="ja-JP" sz="2200" dirty="0"/>
+              <a:t>The Temporal Adapter efficiently models local temporal relationships while preserving CLIP's pretrained knowledge, adding temporal context with minimal parameters to improve generalization.</a:t>
+            </a:r>
+            <a:endParaRPr dirty="0"/>
+          </a:p>
+        </p:txBody>
+      </p:sp>
+      <p:sp>
+        <p:nvSpPr>
+          <p:cNvPr id="8" name="Rounded Rectangle 3">
+            <a:extLst>
+              <a:ext uri="{FF2B5EF4-FFF2-40B4-BE49-F238E27FC236}">
+                <a16:creationId xmlns:a16="http://schemas.microsoft.com/office/drawing/2014/main" id="{7BFA227C-C78D-359B-0A59-6AD686B629E7}"/>
+              </a:ext>
+            </a:extLst>
+          </p:cNvPr>
+          <p:cNvSpPr/>
+          <p:nvPr/>
+        </p:nvSpPr>
+        <p:spPr>
+          <a:xfrm>
+            <a:off x="6172200" y="2999232"/>
+            <a:ext cx="5394960" cy="3474720"/>
+          </a:xfrm>
+          <a:prstGeom prst="roundRect">
+            <a:avLst>
+              <a:gd name="adj" fmla="val 8000"/>
+            </a:avLst>
+          </a:prstGeom>
+          <a:solidFill>
+            <a:srgbClr val="E5E7EB"/>
+          </a:solidFill>
+          <a:ln>
+            <a:solidFill>
+              <a:srgbClr val="E5E7EB"/>
+            </a:solidFill>
+          </a:ln>
+        </p:spPr>
+        <p:style>
+          <a:lnRef idx="1">
+            <a:schemeClr val="accent1"/>
+          </a:lnRef>
+          <a:fillRef idx="3">
+            <a:schemeClr val="accent1"/>
+          </a:fillRef>
+          <a:effectRef idx="2">
+            <a:schemeClr val="accent1"/>
+          </a:effectRef>
+          <a:fontRef idx="minor">
+            <a:schemeClr val="lt1"/>
+          </a:fontRef>
+        </p:style>
+        <p:txBody>
+          <a:bodyPr rtlCol="0" anchor="ctr"/>
+          <a:lstStyle/>
+          <a:p>
+            <a:pPr algn="ctr"/>
+            <a:endParaRPr/>
+          </a:p>
+        </p:txBody>
+      </p:sp>
+      <p:sp>
+        <p:nvSpPr>
+          <p:cNvPr id="9" name="TextBox 4">
+            <a:extLst>
+              <a:ext uri="{FF2B5EF4-FFF2-40B4-BE49-F238E27FC236}">
+                <a16:creationId xmlns:a16="http://schemas.microsoft.com/office/drawing/2014/main" id="{F98926A4-0789-3B5A-764D-8CA2BCC58B14}"/>
+              </a:ext>
+            </a:extLst>
+          </p:cNvPr>
+          <p:cNvSpPr txBox="1"/>
+          <p:nvPr/>
+        </p:nvSpPr>
+        <p:spPr>
+          <a:xfrm>
+            <a:off x="6490621" y="3098445"/>
+            <a:ext cx="4620957" cy="1015663"/>
+          </a:xfrm>
+          <a:prstGeom prst="rect">
+            <a:avLst/>
+          </a:prstGeom>
+          <a:noFill/>
+        </p:spPr>
+        <p:txBody>
+          <a:bodyPr wrap="square">
+            <a:spAutoFit/>
+          </a:bodyPr>
+          <a:lstStyle/>
+          <a:p>
+            <a:pPr>
+              <a:defRPr sz="3000" b="1">
+                <a:solidFill>
+                  <a:srgbClr val="111827"/>
+                </a:solidFill>
+                <a:latin typeface="Aptos Display"/>
+              </a:defRPr>
+            </a:pPr>
+            <a:r>
+              <a:rPr lang="es-MX" altLang="ja-JP" dirty="0" err="1"/>
+              <a:t>Semantic</a:t>
+            </a:r>
+            <a:r>
+              <a:rPr lang="es-MX" altLang="ja-JP" dirty="0"/>
+              <a:t> </a:t>
+            </a:r>
+            <a:r>
+              <a:rPr lang="es-MX" altLang="ja-JP" dirty="0" err="1"/>
+              <a:t>Knowledge</a:t>
+            </a:r>
+            <a:r>
+              <a:rPr lang="es-MX" altLang="ja-JP" dirty="0"/>
+              <a:t> </a:t>
+            </a:r>
+            <a:r>
+              <a:rPr lang="es-MX" altLang="ja-JP" dirty="0" err="1"/>
+              <a:t>Injection</a:t>
+            </a:r>
+            <a:endParaRPr lang="es-MX" altLang="ja-JP" dirty="0"/>
+          </a:p>
+        </p:txBody>
+      </p:sp>
+      <p:sp>
+        <p:nvSpPr>
+          <p:cNvPr id="10" name="TextBox 5">
+            <a:extLst>
+              <a:ext uri="{FF2B5EF4-FFF2-40B4-BE49-F238E27FC236}">
+                <a16:creationId xmlns:a16="http://schemas.microsoft.com/office/drawing/2014/main" id="{09F4DE17-BAD0-1C30-AFDE-18C611B65817}"/>
+              </a:ext>
+            </a:extLst>
+          </p:cNvPr>
+          <p:cNvSpPr txBox="1"/>
+          <p:nvPr/>
+        </p:nvSpPr>
+        <p:spPr>
+          <a:xfrm>
+            <a:off x="6537960" y="4050792"/>
+            <a:ext cx="4526280" cy="2123658"/>
+          </a:xfrm>
+          <a:prstGeom prst="rect">
+            <a:avLst/>
+          </a:prstGeom>
+          <a:noFill/>
+        </p:spPr>
+        <p:txBody>
+          <a:bodyPr wrap="square">
+            <a:spAutoFit/>
+          </a:bodyPr>
+          <a:lstStyle/>
+          <a:p>
+            <a:pPr>
+              <a:defRPr sz="2200" b="0">
+                <a:solidFill>
+                  <a:srgbClr val="4B5563"/>
+                </a:solidFill>
+                <a:latin typeface="Aptos"/>
+              </a:defRPr>
+            </a:pPr>
+            <a:r>
+              <a:rPr lang="en-US" altLang="ja-JP" sz="2200" dirty="0"/>
+              <a:t>SKI injects anomaly-related semantic knowledge into visual features, enabling the model to understand event types rather than performing only binary anomaly detection.</a:t>
+            </a:r>
+            <a:endParaRPr dirty="0"/>
           </a:p>
         </p:txBody>
       </p:sp>
     </p:spTree>
+    <p:extLst>
+      <p:ext uri="{BB962C8B-B14F-4D97-AF65-F5344CB8AC3E}">
+        <p14:creationId xmlns:p14="http://schemas.microsoft.com/office/powerpoint/2010/main" val="195554795"/>
+      </p:ext>
+    </p:extLst>
   </p:cSld>
   <p:clrMapOvr>
     <a:masterClrMapping/>
